--- a/pitch/CestomClash228-Pitch.pptx
+++ b/pitch/CestomClash228-Pitch.pptx
@@ -1,21 +1,21 @@
 
 <file path=ppt/presentation.xml><?xml version="1.0" encoding="utf-8"?>
-<p:presentation xmlns:a="http://schemas.openxmlformats.org/drawingml/2006/main" xmlns:r="http://schemas.openxmlformats.org/officeDocument/2006/relationships" xmlns:p="http://schemas.openxmlformats.org/presentationml/2006/main" saveSubsetFonts="1" autoCompressPictures="0">
+<p:presentation xmlns:a="http://schemas.openxmlformats.org/drawingml/2006/main" xmlns:r="http://schemas.openxmlformats.org/officeDocument/2006/relationships" xmlns:p="http://schemas.openxmlformats.org/presentationml/2006/main" autoCompressPictures="0">
   <p:sldMasterIdLst>
     <p:sldMasterId id="2147483648" r:id="rId1"/>
   </p:sldMasterIdLst>
+  <p:notesMasterIdLst>
+    <p:notesMasterId r:id="rId4"/>
+  </p:notesMasterIdLst>
   <p:sldIdLst>
-    <p:sldId id="256" r:id="rId2"/>
-    <p:sldId id="257" r:id="rId3"/>
-    <p:sldId id="258" r:id="rId4"/>
-    <p:sldId id="259" r:id="rId5"/>
-    <p:sldId id="260" r:id="rId6"/>
+    <p:sldId id="256" r:id="rId3"/>
+    <p:sldId id="257" r:id="rId5"/>
+    <p:sldId id="258" r:id="rId6"/>
+    <p:sldId id="259" r:id="rId7"/>
+    <p:sldId id="260" r:id="rId8"/>
   </p:sldIdLst>
-  <p:notesMasterIdLst>
-    <p:notesMasterId r:id="rId7"/>
-  </p:notesMasterIdLst>
-  <p:sldSz cx="12191695" cy="6858000"/>
-  <p:notesSz cx="6858000" cy="12191695"/>
+  <p:sldSz cx="12191365" cy="6858000"/>
+  <p:notesSz cx="6858000" cy="12191365"/>
   <p:defaultTextStyle>
     <a:lvl1pPr marL="0" algn="l" defTabSz="914400" rtl="0" eaLnBrk="1" latinLnBrk="0" hangingPunct="1">
       <a:defRPr sz="1800" kern="1200">
@@ -193,7 +193,6 @@
           <a:p>
             <a:fld id="{5282F153-3F37-0F45-9E97-73ACFA13230C}" type="datetimeFigureOut">
               <a:rPr lang="en-US"/>
-              <a:t>7/23/19</a:t>
             </a:fld>
             <a:endParaRPr lang="en-US"/>
           </a:p>
@@ -260,6 +259,7 @@
               <a:rPr lang="en-US"/>
               <a:t>Click to edit Master text styles</a:t>
             </a:r>
+            <a:endParaRPr lang="en-US"/>
           </a:p>
           <a:p>
             <a:pPr lvl="1"/>
@@ -267,6 +267,7 @@
               <a:rPr lang="en-US"/>
               <a:t>Second level</a:t>
             </a:r>
+            <a:endParaRPr lang="en-US"/>
           </a:p>
           <a:p>
             <a:pPr lvl="2"/>
@@ -274,6 +275,7 @@
               <a:rPr lang="en-US"/>
               <a:t>Third level</a:t>
             </a:r>
+            <a:endParaRPr lang="en-US"/>
           </a:p>
           <a:p>
             <a:pPr lvl="3"/>
@@ -281,6 +283,7 @@
               <a:rPr lang="en-US"/>
               <a:t>Fourth level</a:t>
             </a:r>
+            <a:endParaRPr lang="en-US"/>
           </a:p>
           <a:p>
             <a:pPr lvl="4"/>
@@ -288,6 +291,7 @@
               <a:rPr lang="en-US"/>
               <a:t>Fifth level</a:t>
             </a:r>
+            <a:endParaRPr lang="en-US"/>
           </a:p>
         </p:txBody>
       </p:sp>
@@ -351,18 +355,12 @@
           <a:p>
             <a:fld id="{CE5E9CC1-C706-0F49-92D6-E571CC5EEA8F}" type="slidenum">
               <a:rPr lang="en-US"/>
-              <a:t>‹#›</a:t>
             </a:fld>
             <a:endParaRPr lang="en-US"/>
           </a:p>
         </p:txBody>
       </p:sp>
     </p:spTree>
-    <p:extLst>
-      <p:ext uri="{BB962C8B-B14F-4D97-AF65-F5344CB8AC3E}">
-        <p14:creationId xmlns:p14="http://schemas.microsoft.com/office/powerpoint/2010/main" val="1024086991"/>
-      </p:ext>
-    </p:extLst>
   </p:cSld>
   <p:clrMap bg1="lt1" tx1="dk1" bg2="lt2" tx2="dk2" accent1="accent1" accent2="accent2" accent3="accent3" accent4="accent4" accent5="accent5" accent6="accent6" hlink="hlink" folHlink="folHlink"/>
   <p:notesStyle>
@@ -504,10 +502,6 @@
           <a:bodyPr/>
           <a:lstStyle/>
           <a:p>
-            <a:r>
-              <a:rPr lang="en-US" dirty="0"/>
-              <a:t/>
-            </a:r>
             <a:endParaRPr lang="en-US" dirty="0"/>
           </a:p>
         </p:txBody>
@@ -529,18 +523,12 @@
           <a:p>
             <a:fld id="{F7021451-1387-4CA6-816F-3879F97B5CBC}" type="slidenum">
               <a:rPr lang="en-US"/>
-              <a:t>1</a:t>
             </a:fld>
             <a:endParaRPr lang="en-US"/>
           </a:p>
         </p:txBody>
       </p:sp>
     </p:spTree>
-    <p:extLst>
-      <p:ext uri="{BB962C8B-B14F-4D97-AF65-F5344CB8AC3E}">
-        <p14:creationId xmlns:p14="http://schemas.microsoft.com/office/powerpoint/2010/main" val="1024086991"/>
-      </p:ext>
-    </p:extLst>
   </p:cSld>
   <p:clrMapOvr>
     <a:masterClrMapping/>
@@ -592,10 +580,6 @@
           <a:bodyPr/>
           <a:lstStyle/>
           <a:p>
-            <a:r>
-              <a:rPr lang="en-US" dirty="0"/>
-              <a:t/>
-            </a:r>
             <a:endParaRPr lang="en-US" dirty="0"/>
           </a:p>
         </p:txBody>
@@ -617,18 +601,12 @@
           <a:p>
             <a:fld id="{F7021451-1387-4CA6-816F-3879F97B5CBC}" type="slidenum">
               <a:rPr lang="en-US"/>
-              <a:t>2</a:t>
             </a:fld>
             <a:endParaRPr lang="en-US"/>
           </a:p>
         </p:txBody>
       </p:sp>
     </p:spTree>
-    <p:extLst>
-      <p:ext uri="{BB962C8B-B14F-4D97-AF65-F5344CB8AC3E}">
-        <p14:creationId xmlns:p14="http://schemas.microsoft.com/office/powerpoint/2010/main" val="1024086991"/>
-      </p:ext>
-    </p:extLst>
   </p:cSld>
   <p:clrMapOvr>
     <a:masterClrMapping/>
@@ -680,10 +658,6 @@
           <a:bodyPr/>
           <a:lstStyle/>
           <a:p>
-            <a:r>
-              <a:rPr lang="en-US" dirty="0"/>
-              <a:t/>
-            </a:r>
             <a:endParaRPr lang="en-US" dirty="0"/>
           </a:p>
         </p:txBody>
@@ -705,18 +679,12 @@
           <a:p>
             <a:fld id="{F7021451-1387-4CA6-816F-3879F97B5CBC}" type="slidenum">
               <a:rPr lang="en-US"/>
-              <a:t>3</a:t>
             </a:fld>
             <a:endParaRPr lang="en-US"/>
           </a:p>
         </p:txBody>
       </p:sp>
     </p:spTree>
-    <p:extLst>
-      <p:ext uri="{BB962C8B-B14F-4D97-AF65-F5344CB8AC3E}">
-        <p14:creationId xmlns:p14="http://schemas.microsoft.com/office/powerpoint/2010/main" val="1024086991"/>
-      </p:ext>
-    </p:extLst>
   </p:cSld>
   <p:clrMapOvr>
     <a:masterClrMapping/>
@@ -768,10 +736,6 @@
           <a:bodyPr/>
           <a:lstStyle/>
           <a:p>
-            <a:r>
-              <a:rPr lang="en-US" dirty="0"/>
-              <a:t/>
-            </a:r>
             <a:endParaRPr lang="en-US" dirty="0"/>
           </a:p>
         </p:txBody>
@@ -793,18 +757,12 @@
           <a:p>
             <a:fld id="{F7021451-1387-4CA6-816F-3879F97B5CBC}" type="slidenum">
               <a:rPr lang="en-US"/>
-              <a:t>4</a:t>
             </a:fld>
             <a:endParaRPr lang="en-US"/>
           </a:p>
         </p:txBody>
       </p:sp>
     </p:spTree>
-    <p:extLst>
-      <p:ext uri="{BB962C8B-B14F-4D97-AF65-F5344CB8AC3E}">
-        <p14:creationId xmlns:p14="http://schemas.microsoft.com/office/powerpoint/2010/main" val="1024086991"/>
-      </p:ext>
-    </p:extLst>
   </p:cSld>
   <p:clrMapOvr>
     <a:masterClrMapping/>
@@ -856,10 +814,6 @@
           <a:bodyPr/>
           <a:lstStyle/>
           <a:p>
-            <a:r>
-              <a:rPr lang="en-US" dirty="0"/>
-              <a:t/>
-            </a:r>
             <a:endParaRPr lang="en-US" dirty="0"/>
           </a:p>
         </p:txBody>
@@ -881,18 +835,12 @@
           <a:p>
             <a:fld id="{F7021451-1387-4CA6-816F-3879F97B5CBC}" type="slidenum">
               <a:rPr lang="en-US"/>
-              <a:t>5</a:t>
             </a:fld>
             <a:endParaRPr lang="en-US"/>
           </a:p>
         </p:txBody>
       </p:sp>
     </p:spTree>
-    <p:extLst>
-      <p:ext uri="{BB962C8B-B14F-4D97-AF65-F5344CB8AC3E}">
-        <p14:creationId xmlns:p14="http://schemas.microsoft.com/office/powerpoint/2010/main" val="1024086991"/>
-      </p:ext>
-    </p:extLst>
   </p:cSld>
   <p:clrMapOvr>
     <a:masterClrMapping/>
@@ -933,6 +881,11 @@
 <file path=ppt/slideMasters/slideMaster1.xml><?xml version="1.0" encoding="utf-8"?>
 <p:sldMaster xmlns:a="http://schemas.openxmlformats.org/drawingml/2006/main" xmlns:r="http://schemas.openxmlformats.org/officeDocument/2006/relationships" xmlns:p="http://schemas.openxmlformats.org/presentationml/2006/main">
   <p:cSld>
+    <p:bg>
+      <p:bgRef idx="1001">
+        <a:schemeClr val="bg1"/>
+      </p:bgRef>
+    </p:bg>
     <p:spTree>
       <p:nvGrpSpPr>
         <p:cNvPr id="1" name=""/>
@@ -976,7 +929,7 @@
         <a:spcBef>
           <a:spcPct val="20000"/>
         </a:spcBef>
-        <a:buFont typeface="Arial" pitchFamily="34" charset="0"/>
+        <a:buFont typeface="Arial" panose="020B0604020202020204" pitchFamily="34" charset="0"/>
         <a:buChar char="•"/>
         <a:defRPr sz="3200" kern="1200">
           <a:solidFill>
@@ -991,7 +944,7 @@
         <a:spcBef>
           <a:spcPct val="20000"/>
         </a:spcBef>
-        <a:buFont typeface="Arial" pitchFamily="34" charset="0"/>
+        <a:buFont typeface="Arial" panose="020B0604020202020204" pitchFamily="34" charset="0"/>
         <a:buChar char="–"/>
         <a:defRPr sz="2800" kern="1200">
           <a:solidFill>
@@ -1006,7 +959,7 @@
         <a:spcBef>
           <a:spcPct val="20000"/>
         </a:spcBef>
-        <a:buFont typeface="Arial" pitchFamily="34" charset="0"/>
+        <a:buFont typeface="Arial" panose="020B0604020202020204" pitchFamily="34" charset="0"/>
         <a:buChar char="•"/>
         <a:defRPr sz="2400" kern="1200">
           <a:solidFill>
@@ -1021,7 +974,7 @@
         <a:spcBef>
           <a:spcPct val="20000"/>
         </a:spcBef>
-        <a:buFont typeface="Arial" pitchFamily="34" charset="0"/>
+        <a:buFont typeface="Arial" panose="020B0604020202020204" pitchFamily="34" charset="0"/>
         <a:buChar char="–"/>
         <a:defRPr sz="2000" kern="1200">
           <a:solidFill>
@@ -1036,7 +989,7 @@
         <a:spcBef>
           <a:spcPct val="20000"/>
         </a:spcBef>
-        <a:buFont typeface="Arial" pitchFamily="34" charset="0"/>
+        <a:buFont typeface="Arial" panose="020B0604020202020204" pitchFamily="34" charset="0"/>
         <a:buChar char="»"/>
         <a:defRPr sz="2000" kern="1200">
           <a:solidFill>
@@ -1051,7 +1004,7 @@
         <a:spcBef>
           <a:spcPct val="20000"/>
         </a:spcBef>
-        <a:buFont typeface="Arial" pitchFamily="34" charset="0"/>
+        <a:buFont typeface="Arial" panose="020B0604020202020204" pitchFamily="34" charset="0"/>
         <a:buChar char="•"/>
         <a:defRPr sz="2000" kern="1200">
           <a:solidFill>
@@ -1066,7 +1019,7 @@
         <a:spcBef>
           <a:spcPct val="20000"/>
         </a:spcBef>
-        <a:buFont typeface="Arial" pitchFamily="34" charset="0"/>
+        <a:buFont typeface="Arial" panose="020B0604020202020204" pitchFamily="34" charset="0"/>
         <a:buChar char="•"/>
         <a:defRPr sz="2000" kern="1200">
           <a:solidFill>
@@ -1081,7 +1034,7 @@
         <a:spcBef>
           <a:spcPct val="20000"/>
         </a:spcBef>
-        <a:buFont typeface="Arial" pitchFamily="34" charset="0"/>
+        <a:buFont typeface="Arial" panose="020B0604020202020204" pitchFamily="34" charset="0"/>
         <a:buChar char="•"/>
         <a:defRPr sz="2000" kern="1200">
           <a:solidFill>
@@ -1096,7 +1049,7 @@
         <a:spcBef>
           <a:spcPct val="20000"/>
         </a:spcBef>
-        <a:buFont typeface="Arial" pitchFamily="34" charset="0"/>
+        <a:buFont typeface="Arial" panose="020B0604020202020204" pitchFamily="34" charset="0"/>
         <a:buChar char="•"/>
         <a:defRPr sz="2000" kern="1200">
           <a:solidFill>
@@ -1209,12 +1162,13 @@
 
 <file path=ppt/slides/slide1.xml><?xml version="1.0" encoding="utf-8"?>
 <p:sld xmlns:a="http://schemas.openxmlformats.org/drawingml/2006/main" xmlns:r="http://schemas.openxmlformats.org/officeDocument/2006/relationships" xmlns:p="http://schemas.openxmlformats.org/presentationml/2006/main">
-  <p:cSld name="Slide 1">
+  <p:cSld>
     <p:bg>
       <p:bgPr>
         <a:solidFill>
           <a:srgbClr val="14161C"/>
         </a:solidFill>
+        <a:effectLst/>
       </p:bgPr>
     </p:bg>
     <p:spTree>
@@ -1245,7 +1199,6 @@
           <a:prstGeom prst="rect">
             <a:avLst/>
           </a:prstGeom>
-          <a:ln/>
         </p:spPr>
       </p:sp>
       <p:sp>
@@ -1267,7 +1220,6 @@
               <a:alpha val="85000"/>
             </a:srgbClr>
           </a:solidFill>
-          <a:ln/>
         </p:spPr>
       </p:sp>
       <p:sp>
@@ -1289,7 +1241,6 @@
               <a:alpha val="40000"/>
             </a:srgbClr>
           </a:solidFill>
-          <a:ln/>
         </p:spPr>
       </p:sp>
       <p:sp>
@@ -1311,7 +1262,6 @@
               <a:alpha val="60000"/>
             </a:srgbClr>
           </a:solidFill>
-          <a:ln/>
         </p:spPr>
       </p:sp>
       <p:sp>
@@ -1333,7 +1283,6 @@
               <a:alpha val="85000"/>
             </a:srgbClr>
           </a:solidFill>
-          <a:ln/>
         </p:spPr>
       </p:sp>
       <p:sp>
@@ -1355,7 +1304,6 @@
               <a:alpha val="40000"/>
             </a:srgbClr>
           </a:solidFill>
-          <a:ln/>
         </p:spPr>
       </p:sp>
       <p:sp>
@@ -1377,7 +1325,6 @@
               <a:alpha val="60000"/>
             </a:srgbClr>
           </a:solidFill>
-          <a:ln/>
         </p:spPr>
       </p:sp>
       <p:sp>
@@ -1399,7 +1346,6 @@
               <a:alpha val="85000"/>
             </a:srgbClr>
           </a:solidFill>
-          <a:ln/>
         </p:spPr>
       </p:sp>
       <p:sp>
@@ -1421,7 +1367,6 @@
               <a:alpha val="40000"/>
             </a:srgbClr>
           </a:solidFill>
-          <a:ln/>
         </p:spPr>
       </p:sp>
       <p:sp>
@@ -1443,7 +1388,6 @@
               <a:alpha val="60000"/>
             </a:srgbClr>
           </a:solidFill>
-          <a:ln/>
         </p:spPr>
       </p:sp>
       <p:sp>
@@ -1461,37 +1405,33 @@
             <a:avLst/>
           </a:prstGeom>
           <a:noFill/>
-          <a:ln/>
         </p:spPr>
         <p:txBody>
           <a:bodyPr wrap="square" rtlCol="0" anchor="ctr"/>
           <a:lstStyle/>
           <a:p>
-            <a:pPr algn="ctr" indent="0" marL="0">
-              <a:buNone/>
-            </a:pPr>
-            <a:r>
-              <a:rPr lang="en-US" sz="5200" b="1" spc="100" kern="0" dirty="0">
+            <a:pPr marL="0" indent="0" algn="ctr">
+              <a:buNone/>
+            </a:pPr>
+            <a:r>
+              <a:rPr lang="en-US" sz="5200" b="1" kern="0" spc="100" dirty="0">
                 <a:solidFill>
                   <a:srgbClr val="F5F3EE"/>
                 </a:solidFill>
-                <a:latin typeface="Bahnschrift" pitchFamily="34" charset="0"/>
-                <a:ea typeface="Bahnschrift" pitchFamily="34" charset="-122"/>
-                <a:cs typeface="Bahnschrift" pitchFamily="34" charset="-120"/>
+                <a:latin typeface="Bahnschrift" panose="020B0502040204020203" pitchFamily="34" charset="0"/>
+                <a:ea typeface="Bahnschrift" panose="020B0502040204020203" pitchFamily="34" charset="-122"/>
+                <a:cs typeface="Bahnschrift" panose="020B0502040204020203" pitchFamily="34" charset="-120"/>
               </a:rPr>
               <a:t>CESTOMCLASH</a:t>
             </a:r>
-            <a:pPr algn="ctr" indent="0" marL="0">
-              <a:buNone/>
-            </a:pPr>
-            <a:r>
-              <a:rPr lang="en-US" sz="5200" b="1" spc="100" kern="0" dirty="0">
+            <a:r>
+              <a:rPr lang="en-US" sz="5200" b="1" kern="0" spc="100" dirty="0">
                 <a:solidFill>
                   <a:srgbClr val="FFC94D"/>
                 </a:solidFill>
-                <a:latin typeface="Bahnschrift" pitchFamily="34" charset="0"/>
-                <a:ea typeface="Bahnschrift" pitchFamily="34" charset="-122"/>
-                <a:cs typeface="Bahnschrift" pitchFamily="34" charset="-120"/>
+                <a:latin typeface="Bahnschrift" panose="020B0502040204020203" pitchFamily="34" charset="0"/>
+                <a:ea typeface="Bahnschrift" panose="020B0502040204020203" pitchFamily="34" charset="-122"/>
+                <a:cs typeface="Bahnschrift" panose="020B0502040204020203" pitchFamily="34" charset="-120"/>
               </a:rPr>
               <a:t>228</a:t>
             </a:r>
@@ -1514,13 +1454,12 @@
             <a:avLst/>
           </a:prstGeom>
           <a:noFill/>
-          <a:ln/>
         </p:spPr>
         <p:txBody>
           <a:bodyPr wrap="square" rtlCol="0" anchor="ctr"/>
           <a:lstStyle/>
           <a:p>
-            <a:pPr algn="ctr" indent="0" marL="0">
+            <a:pPr marL="0" indent="0" algn="ctr">
               <a:buNone/>
             </a:pPr>
             <a:r>
@@ -1528,9 +1467,9 @@
                 <a:solidFill>
                   <a:srgbClr val="3FE0FF"/>
                 </a:solidFill>
-                <a:latin typeface="Segoe UI" pitchFamily="34" charset="0"/>
-                <a:ea typeface="Segoe UI" pitchFamily="34" charset="-122"/>
-                <a:cs typeface="Segoe UI" pitchFamily="34" charset="-120"/>
+                <a:latin typeface="Segoe UI" panose="020B0502040204020203" pitchFamily="34" charset="0"/>
+                <a:ea typeface="Segoe UI" panose="020B0502040204020203" pitchFamily="34" charset="-122"/>
+                <a:cs typeface="Segoe UI" panose="020B0502040204020203" pitchFamily="34" charset="-120"/>
               </a:rPr>
               <a:t>Explore. Partage. Level-up.</a:t>
             </a:r>
@@ -1553,13 +1492,12 @@
             <a:avLst/>
           </a:prstGeom>
           <a:noFill/>
-          <a:ln/>
         </p:spPr>
         <p:txBody>
           <a:bodyPr wrap="square" rtlCol="0" anchor="ctr"/>
           <a:lstStyle/>
           <a:p>
-            <a:pPr algn="ctr" indent="0" marL="0">
+            <a:pPr marL="0" indent="0" algn="ctr">
               <a:buNone/>
             </a:pPr>
             <a:r>
@@ -1567,9 +1505,9 @@
                 <a:solidFill>
                   <a:srgbClr val="A3ABBD"/>
                 </a:solidFill>
-                <a:latin typeface="Segoe UI" pitchFamily="34" charset="0"/>
-                <a:ea typeface="Segoe UI" pitchFamily="34" charset="-122"/>
-                <a:cs typeface="Segoe UI" pitchFamily="34" charset="-120"/>
+                <a:latin typeface="Segoe UI" panose="020B0502040204020203" pitchFamily="34" charset="0"/>
+                <a:ea typeface="Segoe UI" panose="020B0502040204020203" pitchFamily="34" charset="-122"/>
+                <a:cs typeface="Segoe UI" panose="020B0502040204020203" pitchFamily="34" charset="-120"/>
               </a:rPr>
               <a:t>La plateforme qui transforme l'entraide entre étudiants togolais au Maroc en réputation — et en revenu</a:t>
             </a:r>
@@ -1579,7 +1517,7 @@
       </p:sp>
       <p:pic>
         <p:nvPicPr>
-          <p:cNvPr id="15" name="Image 0" descr="C:\Users\Wilfried\OneDrive\Bureau\Wilfried\professionnel\CreaAfrica\assets\brand\CESTOM.png">    </p:cNvPr>
+          <p:cNvPr id="15" name="Image 0" descr="C:\Users\Wilfried\OneDrive\Bureau\Wilfried\professionnel\CreaAfrica\pitch\creaafrica-logo-cropped.png"/>
           <p:cNvPicPr>
             <a:picLocks noChangeAspect="1"/>
           </p:cNvPicPr>
@@ -1593,6 +1531,30 @@
         </p:blipFill>
         <p:spPr>
           <a:xfrm>
+            <a:off x="502920" y="411480"/>
+            <a:ext cx="1737360" cy="534307"/>
+          </a:xfrm>
+          <a:prstGeom prst="rect">
+            <a:avLst/>
+          </a:prstGeom>
+        </p:spPr>
+      </p:pic>
+      <p:pic>
+        <p:nvPicPr>
+          <p:cNvPr id="16" name="Image 1" descr="C:\Users\Wilfried\OneDrive\Bureau\Wilfried\professionnel\CreaAfrica\apps\web\src\app\icon.png"/>
+          <p:cNvPicPr>
+            <a:picLocks noChangeAspect="1"/>
+          </p:cNvPicPr>
+          <p:nvPr/>
+        </p:nvPicPr>
+        <p:blipFill>
+          <a:blip r:embed="rId2"/>
+          <a:stretch>
+            <a:fillRect/>
+          </a:stretch>
+        </p:blipFill>
+        <p:spPr>
+          <a:xfrm>
             <a:off x="5775808" y="4846320"/>
             <a:ext cx="640080" cy="640080"/>
           </a:xfrm>
@@ -1603,7 +1565,7 @@
       </p:pic>
       <p:sp>
         <p:nvSpPr>
-          <p:cNvPr id="16" name="Text 13"/>
+          <p:cNvPr id="17" name="Text 13"/>
           <p:cNvSpPr/>
           <p:nvPr/>
         </p:nvSpPr>
@@ -1616,13 +1578,12 @@
             <a:avLst/>
           </a:prstGeom>
           <a:noFill/>
-          <a:ln/>
         </p:spPr>
         <p:txBody>
           <a:bodyPr wrap="square" rtlCol="0" anchor="ctr"/>
           <a:lstStyle/>
           <a:p>
-            <a:pPr algn="ctr" indent="0" marL="0">
+            <a:pPr marL="0" indent="0" algn="ctr">
               <a:buNone/>
             </a:pPr>
             <a:r>
@@ -1630,9 +1591,9 @@
                 <a:solidFill>
                   <a:srgbClr val="A3ABBD"/>
                 </a:solidFill>
-                <a:latin typeface="Segoe UI" pitchFamily="34" charset="0"/>
-                <a:ea typeface="Segoe UI" pitchFamily="34" charset="-122"/>
-                <a:cs typeface="Segoe UI" pitchFamily="34" charset="-120"/>
+                <a:latin typeface="Segoe UI" panose="020B0502040204020203" pitchFamily="34" charset="0"/>
+                <a:ea typeface="Segoe UI" panose="020B0502040204020203" pitchFamily="34" charset="-122"/>
+                <a:cs typeface="Segoe UI" panose="020B0502040204020203" pitchFamily="34" charset="-120"/>
               </a:rPr>
               <a:t>Concours CréaAfrica 2026 · Propulsé par CESTOM</a:t>
             </a:r>
@@ -1650,12 +1611,13 @@
 
 <file path=ppt/slides/slide2.xml><?xml version="1.0" encoding="utf-8"?>
 <p:sld xmlns:a="http://schemas.openxmlformats.org/drawingml/2006/main" xmlns:r="http://schemas.openxmlformats.org/officeDocument/2006/relationships" xmlns:p="http://schemas.openxmlformats.org/presentationml/2006/main">
-  <p:cSld name="Slide 2">
+  <p:cSld>
     <p:bg>
       <p:bgPr>
         <a:solidFill>
           <a:srgbClr val="14161C"/>
         </a:solidFill>
+        <a:effectLst/>
       </p:bgPr>
     </p:bg>
     <p:spTree>
@@ -1691,7 +1653,6 @@
               <a:alpha val="8000"/>
             </a:srgbClr>
           </a:solidFill>
-          <a:ln/>
         </p:spPr>
       </p:sp>
       <p:sp>
@@ -1708,7 +1669,6 @@
           <a:prstGeom prst="rect">
             <a:avLst/>
           </a:prstGeom>
-          <a:ln/>
         </p:spPr>
       </p:sp>
       <p:sp>
@@ -1726,13 +1686,12 @@
             <a:avLst/>
           </a:prstGeom>
           <a:noFill/>
-          <a:ln/>
         </p:spPr>
         <p:txBody>
           <a:bodyPr wrap="square" rtlCol="0" anchor="ctr"/>
           <a:lstStyle/>
           <a:p>
-            <a:pPr indent="0" marL="0">
+            <a:pPr marL="0" indent="0">
               <a:buNone/>
             </a:pPr>
             <a:r>
@@ -1740,9 +1699,9 @@
                 <a:solidFill>
                   <a:srgbClr val="F5F3EE"/>
                 </a:solidFill>
-                <a:latin typeface="Bahnschrift" pitchFamily="34" charset="0"/>
-                <a:ea typeface="Bahnschrift" pitchFamily="34" charset="-122"/>
-                <a:cs typeface="Bahnschrift" pitchFamily="34" charset="-120"/>
+                <a:latin typeface="Bahnschrift" panose="020B0502040204020203" pitchFamily="34" charset="0"/>
+                <a:ea typeface="Bahnschrift" panose="020B0502040204020203" pitchFamily="34" charset="-122"/>
+                <a:cs typeface="Bahnschrift" panose="020B0502040204020203" pitchFamily="34" charset="-120"/>
               </a:rPr>
               <a:t>Le problème</a:t>
             </a:r>
@@ -1765,13 +1724,12 @@
             <a:avLst/>
           </a:prstGeom>
           <a:noFill/>
-          <a:ln/>
         </p:spPr>
         <p:txBody>
           <a:bodyPr wrap="square" rtlCol="0" anchor="ctr"/>
           <a:lstStyle/>
           <a:p>
-            <a:pPr indent="0" marL="0">
+            <a:pPr marL="0" indent="0">
               <a:buNone/>
             </a:pPr>
             <a:r>
@@ -1779,11 +1737,11 @@
                 <a:solidFill>
                   <a:srgbClr val="A3ABBD"/>
                 </a:solidFill>
-                <a:latin typeface="Segoe UI" pitchFamily="34" charset="0"/>
-                <a:ea typeface="Segoe UI" pitchFamily="34" charset="-122"/>
-                <a:cs typeface="Segoe UI" pitchFamily="34" charset="-120"/>
-              </a:rPr>
-              <a:t>Trois frictions réelles, vécues chaque semaine par un étudiant togolais au Maroc</a:t>
+                <a:latin typeface="Segoe UI" panose="020B0502040204020203" pitchFamily="34" charset="0"/>
+                <a:ea typeface="Segoe UI" panose="020B0502040204020203" pitchFamily="34" charset="-122"/>
+                <a:cs typeface="Segoe UI" panose="020B0502040204020203" pitchFamily="34" charset="-120"/>
+              </a:rPr>
+              <a:t>Trois réalités récurrentes, avérées après analyse de la vie estudiantine togolaise au Maroc</a:t>
             </a:r>
             <a:endParaRPr lang="en-US" sz="1300" dirty="0"/>
           </a:p>
@@ -1804,23 +1762,22 @@
             <a:avLst/>
           </a:prstGeom>
           <a:noFill/>
-          <a:ln/>
         </p:spPr>
         <p:txBody>
           <a:bodyPr wrap="square" rtlCol="0" anchor="ctr"/>
           <a:lstStyle/>
           <a:p>
-            <a:pPr algn="r" indent="0" marL="0">
-              <a:buNone/>
-            </a:pPr>
-            <a:r>
-              <a:rPr lang="en-US" sz="1100" b="1" spc="100" kern="0" dirty="0">
+            <a:pPr marL="0" indent="0" algn="r">
+              <a:buNone/>
+            </a:pPr>
+            <a:r>
+              <a:rPr lang="en-US" sz="1100" b="1" kern="0" spc="100" dirty="0">
                 <a:solidFill>
                   <a:srgbClr val="A3ABBD"/>
                 </a:solidFill>
-                <a:latin typeface="Bahnschrift" pitchFamily="34" charset="0"/>
-                <a:ea typeface="Bahnschrift" pitchFamily="34" charset="-122"/>
-                <a:cs typeface="Bahnschrift" pitchFamily="34" charset="-120"/>
+                <a:latin typeface="Bahnschrift" panose="020B0502040204020203" pitchFamily="34" charset="0"/>
+                <a:ea typeface="Bahnschrift" panose="020B0502040204020203" pitchFamily="34" charset="-122"/>
+                <a:cs typeface="Bahnschrift" panose="020B0502040204020203" pitchFamily="34" charset="-120"/>
               </a:rPr>
               <a:t>CESTOMCLASH228</a:t>
             </a:r>
@@ -1836,12 +1793,12 @@
         </p:nvSpPr>
         <p:spPr>
           <a:xfrm>
-            <a:off x="640080" y="2057400"/>
-            <a:ext cx="3454298" cy="1965960"/>
+            <a:off x="640080" y="2194560"/>
+            <a:ext cx="3454298" cy="3063240"/>
           </a:xfrm>
           <a:prstGeom prst="roundRect">
             <a:avLst>
-              <a:gd name="adj" fmla="val 3256"/>
+              <a:gd name="adj" fmla="val 2090"/>
             </a:avLst>
           </a:prstGeom>
           <a:ln w="12700">
@@ -1853,7 +1810,7 @@
             <a:prstDash val="solid"/>
           </a:ln>
           <a:effectLst>
-            <a:outerShdw sx="100000" sy="100000" kx="0" ky="0" algn="bl" rotWithShape="0" blurRad="101600" dist="50800" dir="16200000">
+            <a:outerShdw blurRad="101600" dist="50800" dir="16200000" algn="bl" rotWithShape="0">
               <a:srgbClr val="FF4D5E">
                 <a:alpha val="28000"/>
               </a:srgbClr>
@@ -1869,8 +1826,8 @@
         </p:nvSpPr>
         <p:spPr>
           <a:xfrm>
-            <a:off x="832744" y="2066544"/>
-            <a:ext cx="3068970" cy="18288"/>
+            <a:off x="940278" y="2203704"/>
+            <a:ext cx="2853903" cy="18288"/>
           </a:xfrm>
           <a:prstGeom prst="rect">
             <a:avLst/>
@@ -1880,7 +1837,6 @@
               <a:alpha val="65000"/>
             </a:srgbClr>
           </a:solidFill>
-          <a:ln/>
         </p:spPr>
       </p:sp>
       <p:sp>
@@ -1891,7 +1847,7 @@
         </p:nvSpPr>
         <p:spPr>
           <a:xfrm>
-            <a:off x="3692042" y="2203704"/>
+            <a:off x="3692042" y="2340864"/>
             <a:ext cx="292608" cy="292608"/>
           </a:xfrm>
           <a:prstGeom prst="ellipse">
@@ -1900,9 +1856,8 @@
           <a:solidFill>
             <a:srgbClr val="FF4D5E"/>
           </a:solidFill>
-          <a:ln/>
           <a:effectLst>
-            <a:outerShdw sx="100000" sy="100000" kx="0" ky="0" algn="bl" rotWithShape="0" blurRad="76200" dist="50800" dir="16200000">
+            <a:outerShdw blurRad="76200" dist="50800" dir="16200000" algn="bl" rotWithShape="0">
               <a:srgbClr val="FF4D5E">
                 <a:alpha val="50000"/>
               </a:srgbClr>
@@ -1918,34 +1873,33 @@
         </p:nvSpPr>
         <p:spPr>
           <a:xfrm>
-            <a:off x="3692042" y="2203704"/>
+            <a:off x="3692042" y="2340864"/>
             <a:ext cx="292608" cy="292608"/>
           </a:xfrm>
           <a:prstGeom prst="rect">
             <a:avLst/>
           </a:prstGeom>
           <a:noFill/>
-          <a:ln/>
         </p:spPr>
         <p:txBody>
           <a:bodyPr wrap="square" rtlCol="0" anchor="ctr"/>
           <a:lstStyle/>
           <a:p>
-            <a:pPr algn="ctr" indent="0" marL="0">
-              <a:buNone/>
-            </a:pPr>
-            <a:r>
-              <a:rPr lang="en-US" sz="1408" b="1" dirty="0">
+            <a:pPr marL="0" indent="0" algn="ctr">
+              <a:buNone/>
+            </a:pPr>
+            <a:r>
+              <a:rPr lang="en-US" sz="1410" b="1" dirty="0">
                 <a:solidFill>
                   <a:srgbClr val="14161C"/>
                 </a:solidFill>
-                <a:latin typeface="Bahnschrift" pitchFamily="34" charset="0"/>
-                <a:ea typeface="Bahnschrift" pitchFamily="34" charset="-122"/>
-                <a:cs typeface="Bahnschrift" pitchFamily="34" charset="-120"/>
+                <a:latin typeface="Bahnschrift" panose="020B0502040204020203" pitchFamily="34" charset="0"/>
+                <a:ea typeface="Bahnschrift" panose="020B0502040204020203" pitchFamily="34" charset="-122"/>
+                <a:cs typeface="Bahnschrift" panose="020B0502040204020203" pitchFamily="34" charset="-120"/>
               </a:rPr>
               <a:t>!</a:t>
             </a:r>
-            <a:endParaRPr lang="en-US" sz="1408" dirty="0"/>
+            <a:endParaRPr lang="en-US" sz="1410" dirty="0"/>
           </a:p>
         </p:txBody>
       </p:sp>
@@ -1957,20 +1911,19 @@
         </p:nvSpPr>
         <p:spPr>
           <a:xfrm>
-            <a:off x="868680" y="2203704"/>
+            <a:off x="868680" y="2340864"/>
             <a:ext cx="2905658" cy="502920"/>
           </a:xfrm>
           <a:prstGeom prst="rect">
             <a:avLst/>
           </a:prstGeom>
           <a:noFill/>
-          <a:ln/>
         </p:spPr>
         <p:txBody>
           <a:bodyPr wrap="square" rtlCol="0" anchor="t"/>
           <a:lstStyle/>
           <a:p>
-            <a:pPr indent="0" marL="0">
+            <a:pPr marL="0" indent="0">
               <a:buNone/>
             </a:pPr>
             <a:r>
@@ -1978,11 +1931,11 @@
                 <a:solidFill>
                   <a:srgbClr val="FF4D5E"/>
                 </a:solidFill>
-                <a:latin typeface="Bahnschrift" pitchFamily="34" charset="0"/>
-                <a:ea typeface="Bahnschrift" pitchFamily="34" charset="-122"/>
-                <a:cs typeface="Bahnschrift" pitchFamily="34" charset="-120"/>
-              </a:rPr>
-              <a:t>Information fragmentée</a:t>
+                <a:latin typeface="Bahnschrift" panose="020B0502040204020203" pitchFamily="34" charset="0"/>
+                <a:ea typeface="Bahnschrift" panose="020B0502040204020203" pitchFamily="34" charset="-122"/>
+                <a:cs typeface="Bahnschrift" panose="020B0502040204020203" pitchFamily="34" charset="-120"/>
+              </a:rPr>
+              <a:t>Information dispersée</a:t>
             </a:r>
             <a:endParaRPr lang="en-US" sz="1350" dirty="0"/>
           </a:p>
@@ -1996,20 +1949,19 @@
         </p:nvSpPr>
         <p:spPr>
           <a:xfrm>
-            <a:off x="868680" y="2679192"/>
-            <a:ext cx="2997098" cy="1188720"/>
-          </a:xfrm>
-          <a:prstGeom prst="rect">
-            <a:avLst/>
-          </a:prstGeom>
-          <a:noFill/>
-          <a:ln/>
+            <a:off x="868680" y="2816352"/>
+            <a:ext cx="2997098" cy="2286000"/>
+          </a:xfrm>
+          <a:prstGeom prst="rect">
+            <a:avLst/>
+          </a:prstGeom>
+          <a:noFill/>
         </p:spPr>
         <p:txBody>
           <a:bodyPr wrap="square" rtlCol="0" anchor="t"/>
           <a:lstStyle/>
           <a:p>
-            <a:pPr indent="0" marL="0">
+            <a:pPr marL="0" indent="0">
               <a:lnSpc>
                 <a:spcPct val="125000"/>
               </a:lnSpc>
@@ -2020,11 +1972,11 @@
                 <a:solidFill>
                   <a:srgbClr val="A3ABBD"/>
                 </a:solidFill>
-                <a:latin typeface="Segoe UI" pitchFamily="34" charset="0"/>
-                <a:ea typeface="Segoe UI" pitchFamily="34" charset="-122"/>
-                <a:cs typeface="Segoe UI" pitchFamily="34" charset="-120"/>
-              </a:rPr>
-              <a:t>WhatsApp non indexable, non consultable après coup, aucune valeur générée pour personne.</a:t>
+                <a:latin typeface="Segoe UI" panose="020B0502040204020203" pitchFamily="34" charset="0"/>
+                <a:ea typeface="Segoe UI" panose="020B0502040204020203" pitchFamily="34" charset="-122"/>
+                <a:cs typeface="Segoe UI" panose="020B0502040204020203" pitchFamily="34" charset="-120"/>
+              </a:rPr>
+              <a:t>Parfois contradictoire d'une source à l'autre, non indexée, non retrouvable après coup.</a:t>
             </a:r>
             <a:endParaRPr lang="en-US" sz="1100" dirty="0"/>
           </a:p>
@@ -2038,12 +1990,12 @@
         </p:nvSpPr>
         <p:spPr>
           <a:xfrm>
-            <a:off x="4368698" y="2057400"/>
-            <a:ext cx="3454298" cy="1965960"/>
+            <a:off x="4368698" y="2194560"/>
+            <a:ext cx="3454298" cy="3063240"/>
           </a:xfrm>
           <a:prstGeom prst="roundRect">
             <a:avLst>
-              <a:gd name="adj" fmla="val 3256"/>
+              <a:gd name="adj" fmla="val 2090"/>
             </a:avLst>
           </a:prstGeom>
           <a:ln w="12700">
@@ -2055,7 +2007,7 @@
             <a:prstDash val="solid"/>
           </a:ln>
           <a:effectLst>
-            <a:outerShdw sx="100000" sy="100000" kx="0" ky="0" algn="bl" rotWithShape="0" blurRad="101600" dist="50800" dir="16200000">
+            <a:outerShdw blurRad="101600" dist="50800" dir="16200000" algn="bl" rotWithShape="0">
               <a:srgbClr val="FF4D5E">
                 <a:alpha val="28000"/>
               </a:srgbClr>
@@ -2071,8 +2023,8 @@
         </p:nvSpPr>
         <p:spPr>
           <a:xfrm>
-            <a:off x="4561362" y="2066544"/>
-            <a:ext cx="3068970" cy="18288"/>
+            <a:off x="4668896" y="2203704"/>
+            <a:ext cx="2853903" cy="18288"/>
           </a:xfrm>
           <a:prstGeom prst="rect">
             <a:avLst/>
@@ -2082,7 +2034,6 @@
               <a:alpha val="65000"/>
             </a:srgbClr>
           </a:solidFill>
-          <a:ln/>
         </p:spPr>
       </p:sp>
       <p:sp>
@@ -2093,7 +2044,7 @@
         </p:nvSpPr>
         <p:spPr>
           <a:xfrm>
-            <a:off x="7420661" y="2203704"/>
+            <a:off x="7420661" y="2340864"/>
             <a:ext cx="292608" cy="292608"/>
           </a:xfrm>
           <a:prstGeom prst="ellipse">
@@ -2102,9 +2053,8 @@
           <a:solidFill>
             <a:srgbClr val="FF4D5E"/>
           </a:solidFill>
-          <a:ln/>
           <a:effectLst>
-            <a:outerShdw sx="100000" sy="100000" kx="0" ky="0" algn="bl" rotWithShape="0" blurRad="76200" dist="50800" dir="16200000">
+            <a:outerShdw blurRad="76200" dist="50800" dir="16200000" algn="bl" rotWithShape="0">
               <a:srgbClr val="FF4D5E">
                 <a:alpha val="50000"/>
               </a:srgbClr>
@@ -2120,34 +2070,33 @@
         </p:nvSpPr>
         <p:spPr>
           <a:xfrm>
-            <a:off x="7420661" y="2203704"/>
+            <a:off x="7420661" y="2340864"/>
             <a:ext cx="292608" cy="292608"/>
           </a:xfrm>
           <a:prstGeom prst="rect">
             <a:avLst/>
           </a:prstGeom>
           <a:noFill/>
-          <a:ln/>
         </p:spPr>
         <p:txBody>
           <a:bodyPr wrap="square" rtlCol="0" anchor="ctr"/>
           <a:lstStyle/>
           <a:p>
-            <a:pPr algn="ctr" indent="0" marL="0">
-              <a:buNone/>
-            </a:pPr>
-            <a:r>
-              <a:rPr lang="en-US" sz="1408" b="1" dirty="0">
+            <a:pPr marL="0" indent="0" algn="ctr">
+              <a:buNone/>
+            </a:pPr>
+            <a:r>
+              <a:rPr lang="en-US" sz="1410" b="1" dirty="0">
                 <a:solidFill>
                   <a:srgbClr val="14161C"/>
                 </a:solidFill>
-                <a:latin typeface="Bahnschrift" pitchFamily="34" charset="0"/>
-                <a:ea typeface="Bahnschrift" pitchFamily="34" charset="-122"/>
-                <a:cs typeface="Bahnschrift" pitchFamily="34" charset="-120"/>
+                <a:latin typeface="Bahnschrift" panose="020B0502040204020203" pitchFamily="34" charset="0"/>
+                <a:ea typeface="Bahnschrift" panose="020B0502040204020203" pitchFamily="34" charset="-122"/>
+                <a:cs typeface="Bahnschrift" panose="020B0502040204020203" pitchFamily="34" charset="-120"/>
               </a:rPr>
               <a:t>!</a:t>
             </a:r>
-            <a:endParaRPr lang="en-US" sz="1408" dirty="0"/>
+            <a:endParaRPr lang="en-US" sz="1410" dirty="0"/>
           </a:p>
         </p:txBody>
       </p:sp>
@@ -2159,20 +2108,19 @@
         </p:nvSpPr>
         <p:spPr>
           <a:xfrm>
-            <a:off x="4597298" y="2203704"/>
+            <a:off x="4597298" y="2340864"/>
             <a:ext cx="2905658" cy="502920"/>
           </a:xfrm>
           <a:prstGeom prst="rect">
             <a:avLst/>
           </a:prstGeom>
           <a:noFill/>
-          <a:ln/>
         </p:spPr>
         <p:txBody>
           <a:bodyPr wrap="square" rtlCol="0" anchor="t"/>
           <a:lstStyle/>
           <a:p>
-            <a:pPr indent="0" marL="0">
+            <a:pPr marL="0" indent="0">
               <a:buNone/>
             </a:pPr>
             <a:r>
@@ -2180,11 +2128,11 @@
                 <a:solidFill>
                   <a:srgbClr val="FF4D5E"/>
                 </a:solidFill>
-                <a:latin typeface="Bahnschrift" pitchFamily="34" charset="0"/>
-                <a:ea typeface="Bahnschrift" pitchFamily="34" charset="-122"/>
-                <a:cs typeface="Bahnschrift" pitchFamily="34" charset="-120"/>
-              </a:rPr>
-              <a:t>Aide rendue non valorisée</a:t>
+                <a:latin typeface="Bahnschrift" panose="020B0502040204020203" pitchFamily="34" charset="0"/>
+                <a:ea typeface="Bahnschrift" panose="020B0502040204020203" pitchFamily="34" charset="-122"/>
+                <a:cs typeface="Bahnschrift" panose="020B0502040204020203" pitchFamily="34" charset="-120"/>
+              </a:rPr>
+              <a:t>L'offre ne trouve pas la demande</a:t>
             </a:r>
             <a:endParaRPr lang="en-US" sz="1350" dirty="0"/>
           </a:p>
@@ -2198,20 +2146,19 @@
         </p:nvSpPr>
         <p:spPr>
           <a:xfrm>
-            <a:off x="4597298" y="2679192"/>
-            <a:ext cx="2997098" cy="1188720"/>
-          </a:xfrm>
-          <a:prstGeom prst="rect">
-            <a:avLst/>
-          </a:prstGeom>
-          <a:noFill/>
-          <a:ln/>
+            <a:off x="4597298" y="2816352"/>
+            <a:ext cx="2997098" cy="2286000"/>
+          </a:xfrm>
+          <a:prstGeom prst="rect">
+            <a:avLst/>
+          </a:prstGeom>
+          <a:noFill/>
         </p:spPr>
         <p:txBody>
           <a:bodyPr wrap="square" rtlCol="0" anchor="t"/>
           <a:lstStyle/>
           <a:p>
-            <a:pPr indent="0" marL="0">
+            <a:pPr marL="0" indent="0">
               <a:lnSpc>
                 <a:spcPct val="125000"/>
               </a:lnSpc>
@@ -2222,11 +2169,11 @@
                 <a:solidFill>
                   <a:srgbClr val="A3ABBD"/>
                 </a:solidFill>
-                <a:latin typeface="Segoe UI" pitchFamily="34" charset="0"/>
-                <a:ea typeface="Segoe UI" pitchFamily="34" charset="-122"/>
-                <a:cs typeface="Segoe UI" pitchFamily="34" charset="-120"/>
-              </a:rPr>
-              <a:t>Celui qui aide un pair n'obtient aujourd'hui aucune reconnaissance durable, aucune trace.</a:t>
+                <a:latin typeface="Segoe UI" panose="020B0502040204020203" pitchFamily="34" charset="0"/>
+                <a:ea typeface="Segoe UI" panose="020B0502040204020203" pitchFamily="34" charset="-122"/>
+                <a:cs typeface="Segoe UI" panose="020B0502040204020203" pitchFamily="34" charset="-120"/>
+              </a:rPr>
+              <a:t>Ressource humaine, compétence disponibles, mais aucun moyen de localiser qui en a besoin — même payant.</a:t>
             </a:r>
             <a:endParaRPr lang="en-US" sz="1100" dirty="0"/>
           </a:p>
@@ -2240,12 +2187,12 @@
         </p:nvSpPr>
         <p:spPr>
           <a:xfrm>
-            <a:off x="8097317" y="2057400"/>
-            <a:ext cx="3454298" cy="1965960"/>
+            <a:off x="8097317" y="2194560"/>
+            <a:ext cx="3454298" cy="3063240"/>
           </a:xfrm>
           <a:prstGeom prst="roundRect">
             <a:avLst>
-              <a:gd name="adj" fmla="val 3256"/>
+              <a:gd name="adj" fmla="val 2090"/>
             </a:avLst>
           </a:prstGeom>
           <a:ln w="12700">
@@ -2257,7 +2204,7 @@
             <a:prstDash val="solid"/>
           </a:ln>
           <a:effectLst>
-            <a:outerShdw sx="100000" sy="100000" kx="0" ky="0" algn="bl" rotWithShape="0" blurRad="101600" dist="50800" dir="16200000">
+            <a:outerShdw blurRad="101600" dist="50800" dir="16200000" algn="bl" rotWithShape="0">
               <a:srgbClr val="FF4D5E">
                 <a:alpha val="28000"/>
               </a:srgbClr>
@@ -2273,8 +2220,8 @@
         </p:nvSpPr>
         <p:spPr>
           <a:xfrm>
-            <a:off x="8289981" y="2066544"/>
-            <a:ext cx="3068970" cy="18288"/>
+            <a:off x="8397514" y="2203704"/>
+            <a:ext cx="2853903" cy="18288"/>
           </a:xfrm>
           <a:prstGeom prst="rect">
             <a:avLst/>
@@ -2284,7 +2231,6 @@
               <a:alpha val="65000"/>
             </a:srgbClr>
           </a:solidFill>
-          <a:ln/>
         </p:spPr>
       </p:sp>
       <p:sp>
@@ -2295,7 +2241,7 @@
         </p:nvSpPr>
         <p:spPr>
           <a:xfrm>
-            <a:off x="11149279" y="2203704"/>
+            <a:off x="11149279" y="2340864"/>
             <a:ext cx="292608" cy="292608"/>
           </a:xfrm>
           <a:prstGeom prst="ellipse">
@@ -2304,9 +2250,8 @@
           <a:solidFill>
             <a:srgbClr val="FF4D5E"/>
           </a:solidFill>
-          <a:ln/>
           <a:effectLst>
-            <a:outerShdw sx="100000" sy="100000" kx="0" ky="0" algn="bl" rotWithShape="0" blurRad="76200" dist="50800" dir="16200000">
+            <a:outerShdw blurRad="76200" dist="50800" dir="16200000" algn="bl" rotWithShape="0">
               <a:srgbClr val="FF4D5E">
                 <a:alpha val="50000"/>
               </a:srgbClr>
@@ -2322,34 +2267,33 @@
         </p:nvSpPr>
         <p:spPr>
           <a:xfrm>
-            <a:off x="11149279" y="2203704"/>
+            <a:off x="11149279" y="2340864"/>
             <a:ext cx="292608" cy="292608"/>
           </a:xfrm>
           <a:prstGeom prst="rect">
             <a:avLst/>
           </a:prstGeom>
           <a:noFill/>
-          <a:ln/>
         </p:spPr>
         <p:txBody>
           <a:bodyPr wrap="square" rtlCol="0" anchor="ctr"/>
           <a:lstStyle/>
           <a:p>
-            <a:pPr algn="ctr" indent="0" marL="0">
-              <a:buNone/>
-            </a:pPr>
-            <a:r>
-              <a:rPr lang="en-US" sz="1408" b="1" dirty="0">
+            <a:pPr marL="0" indent="0" algn="ctr">
+              <a:buNone/>
+            </a:pPr>
+            <a:r>
+              <a:rPr lang="en-US" sz="1410" b="1" dirty="0">
                 <a:solidFill>
                   <a:srgbClr val="14161C"/>
                 </a:solidFill>
-                <a:latin typeface="Bahnschrift" pitchFamily="34" charset="0"/>
-                <a:ea typeface="Bahnschrift" pitchFamily="34" charset="-122"/>
-                <a:cs typeface="Bahnschrift" pitchFamily="34" charset="-120"/>
+                <a:latin typeface="Bahnschrift" panose="020B0502040204020203" pitchFamily="34" charset="0"/>
+                <a:ea typeface="Bahnschrift" panose="020B0502040204020203" pitchFamily="34" charset="-122"/>
+                <a:cs typeface="Bahnschrift" panose="020B0502040204020203" pitchFamily="34" charset="-120"/>
               </a:rPr>
               <a:t>!</a:t>
             </a:r>
-            <a:endParaRPr lang="en-US" sz="1408" dirty="0"/>
+            <a:endParaRPr lang="en-US" sz="1410" dirty="0"/>
           </a:p>
         </p:txBody>
       </p:sp>
@@ -2361,20 +2305,19 @@
         </p:nvSpPr>
         <p:spPr>
           <a:xfrm>
-            <a:off x="8325917" y="2203704"/>
+            <a:off x="8325917" y="2340864"/>
             <a:ext cx="2905658" cy="502920"/>
           </a:xfrm>
           <a:prstGeom prst="rect">
             <a:avLst/>
           </a:prstGeom>
           <a:noFill/>
-          <a:ln/>
         </p:spPr>
         <p:txBody>
           <a:bodyPr wrap="square" rtlCol="0" anchor="t"/>
           <a:lstStyle/>
           <a:p>
-            <a:pPr indent="0" marL="0">
+            <a:pPr marL="0" indent="0">
               <a:buNone/>
             </a:pPr>
             <a:r>
@@ -2382,9 +2325,9 @@
                 <a:solidFill>
                   <a:srgbClr val="FF4D5E"/>
                 </a:solidFill>
-                <a:latin typeface="Bahnschrift" pitchFamily="34" charset="0"/>
-                <a:ea typeface="Bahnschrift" pitchFamily="34" charset="-122"/>
-                <a:cs typeface="Bahnschrift" pitchFamily="34" charset="-120"/>
+                <a:latin typeface="Bahnschrift" panose="020B0502040204020203" pitchFamily="34" charset="0"/>
+                <a:ea typeface="Bahnschrift" panose="020B0502040204020203" pitchFamily="34" charset="-122"/>
+                <a:cs typeface="Bahnschrift" panose="020B0502040204020203" pitchFamily="34" charset="-120"/>
               </a:rPr>
               <a:t>Isolement à l'arrivée</a:t>
             </a:r>
@@ -2400,20 +2343,19 @@
         </p:nvSpPr>
         <p:spPr>
           <a:xfrm>
-            <a:off x="8325917" y="2679192"/>
-            <a:ext cx="2997098" cy="1188720"/>
-          </a:xfrm>
-          <a:prstGeom prst="rect">
-            <a:avLst/>
-          </a:prstGeom>
-          <a:noFill/>
-          <a:ln/>
+            <a:off x="8325917" y="2816352"/>
+            <a:ext cx="2997098" cy="2286000"/>
+          </a:xfrm>
+          <a:prstGeom prst="rect">
+            <a:avLst/>
+          </a:prstGeom>
+          <a:noFill/>
         </p:spPr>
         <p:txBody>
           <a:bodyPr wrap="square" rtlCol="0" anchor="t"/>
           <a:lstStyle/>
           <a:p>
-            <a:pPr indent="0" marL="0">
+            <a:pPr marL="0" indent="0">
               <a:lnSpc>
                 <a:spcPct val="125000"/>
               </a:lnSpc>
@@ -2424,9 +2366,9 @@
                 <a:solidFill>
                   <a:srgbClr val="A3ABBD"/>
                 </a:solidFill>
-                <a:latin typeface="Segoe UI" pitchFamily="34" charset="0"/>
-                <a:ea typeface="Segoe UI" pitchFamily="34" charset="-122"/>
-                <a:cs typeface="Segoe UI" pitchFamily="34" charset="-120"/>
+                <a:latin typeface="Segoe UI" panose="020B0502040204020203" pitchFamily="34" charset="0"/>
+                <a:ea typeface="Segoe UI" panose="020B0502040204020203" pitchFamily="34" charset="-122"/>
+                <a:cs typeface="Segoe UI" panose="020B0502040204020203" pitchFamily="34" charset="-120"/>
               </a:rPr>
               <a:t>Un nouvel arrivant manque des codes locaux essentiels au moment où il en a le plus besoin.</a:t>
             </a:r>
@@ -2436,82 +2378,7 @@
       </p:sp>
       <p:sp>
         <p:nvSpPr>
-          <p:cNvPr id="25" name="Shape 23"/>
-          <p:cNvSpPr/>
-          <p:nvPr/>
-        </p:nvSpPr>
-        <p:spPr>
-          <a:xfrm>
-            <a:off x="640080" y="4343400"/>
-            <a:ext cx="10911535" cy="1051560"/>
-          </a:xfrm>
-          <a:prstGeom prst="roundRect">
-            <a:avLst>
-              <a:gd name="adj" fmla="val 6957"/>
-            </a:avLst>
-          </a:prstGeom>
-          <a:solidFill>
-            <a:srgbClr val="242836"/>
-          </a:solidFill>
-          <a:ln w="12700">
-            <a:solidFill>
-              <a:srgbClr val="FF4D5E">
-                <a:alpha val="70000"/>
-              </a:srgbClr>
-            </a:solidFill>
-            <a:prstDash val="solid"/>
-          </a:ln>
-          <a:effectLst>
-            <a:outerShdw sx="100000" sy="100000" kx="0" ky="0" algn="bl" rotWithShape="0" blurRad="101600" dist="50800" dir="16200000">
-              <a:srgbClr val="FF4D5E">
-                <a:alpha val="25000"/>
-              </a:srgbClr>
-            </a:outerShdw>
-          </a:effectLst>
-        </p:spPr>
-      </p:sp>
-      <p:sp>
-        <p:nvSpPr>
-          <p:cNvPr id="26" name="Text 24"/>
-          <p:cNvSpPr/>
-          <p:nvPr/>
-        </p:nvSpPr>
-        <p:spPr>
-          <a:xfrm>
-            <a:off x="960120" y="4343400"/>
-            <a:ext cx="10271455" cy="1051560"/>
-          </a:xfrm>
-          <a:prstGeom prst="rect">
-            <a:avLst/>
-          </a:prstGeom>
-          <a:noFill/>
-          <a:ln/>
-        </p:spPr>
-        <p:txBody>
-          <a:bodyPr wrap="square" rtlCol="0" anchor="ctr"/>
-          <a:lstStyle/>
-          <a:p>
-            <a:pPr indent="0" marL="0">
-              <a:buNone/>
-            </a:pPr>
-            <a:r>
-              <a:rPr lang="en-US" sz="1500" i="1" dirty="0">
-                <a:solidFill>
-                  <a:srgbClr val="F5F3EE"/>
-                </a:solidFill>
-                <a:latin typeface="Segoe UI" pitchFamily="34" charset="0"/>
-                <a:ea typeface="Segoe UI" pitchFamily="34" charset="-122"/>
-                <a:cs typeface="Segoe UI" pitchFamily="34" charset="-120"/>
-              </a:rPr>
-              <a:t>"Je suis coincé à la gare de Casa-Voyageurs à 23h, qui peut m'héberger ?"</a:t>
-            </a:r>
-            <a:endParaRPr lang="en-US" sz="1500" dirty="0"/>
-          </a:p>
-        </p:txBody>
-      </p:sp>
-      <p:sp>
-        <p:nvSpPr>
-          <p:cNvPr id="27" name="Text 25"/>
+          <p:cNvPr id="25" name="Text 23"/>
           <p:cNvSpPr/>
           <p:nvPr/>
         </p:nvSpPr>
@@ -2524,37 +2391,33 @@
             <a:avLst/>
           </a:prstGeom>
           <a:noFill/>
-          <a:ln/>
         </p:spPr>
         <p:txBody>
           <a:bodyPr wrap="square" rtlCol="0" anchor="ctr"/>
           <a:lstStyle/>
           <a:p>
-            <a:pPr indent="0" marL="0">
-              <a:buNone/>
-            </a:pPr>
-            <a:r>
-              <a:rPr lang="en-US" sz="1000" b="1" spc="100" kern="0" dirty="0">
+            <a:pPr marL="0" indent="0">
+              <a:buNone/>
+            </a:pPr>
+            <a:r>
+              <a:rPr lang="en-US" sz="1000" b="1" kern="0" spc="100" dirty="0">
                 <a:solidFill>
                   <a:srgbClr val="A3ABBD"/>
                 </a:solidFill>
-                <a:latin typeface="Bahnschrift" pitchFamily="34" charset="0"/>
-                <a:ea typeface="Bahnschrift" pitchFamily="34" charset="-122"/>
-                <a:cs typeface="Bahnschrift" pitchFamily="34" charset="-120"/>
+                <a:latin typeface="Bahnschrift" panose="020B0502040204020203" pitchFamily="34" charset="0"/>
+                <a:ea typeface="Bahnschrift" panose="020B0502040204020203" pitchFamily="34" charset="-122"/>
+                <a:cs typeface="Bahnschrift" panose="020B0502040204020203" pitchFamily="34" charset="-120"/>
               </a:rPr>
               <a:t>CESTOMCLASH228  </a:t>
             </a:r>
-            <a:pPr indent="0" marL="0">
-              <a:buNone/>
-            </a:pPr>
-            <a:r>
-              <a:rPr lang="en-US" sz="1000" spc="100" kern="0" dirty="0">
+            <a:r>
+              <a:rPr lang="en-US" sz="1000" kern="0" spc="100" dirty="0">
                 <a:solidFill>
                   <a:srgbClr val="A3ABBD"/>
                 </a:solidFill>
-                <a:latin typeface="Bahnschrift" pitchFamily="34" charset="0"/>
-                <a:ea typeface="Bahnschrift" pitchFamily="34" charset="-122"/>
-                <a:cs typeface="Bahnschrift" pitchFamily="34" charset="-120"/>
+                <a:latin typeface="Bahnschrift" panose="020B0502040204020203" pitchFamily="34" charset="0"/>
+                <a:ea typeface="Bahnschrift" panose="020B0502040204020203" pitchFamily="34" charset="-122"/>
+                <a:cs typeface="Bahnschrift" panose="020B0502040204020203" pitchFamily="34" charset="-120"/>
               </a:rPr>
               <a:t>· Explore. Partage. Level-up.</a:t>
             </a:r>
@@ -2564,7 +2427,7 @@
       </p:sp>
       <p:sp>
         <p:nvSpPr>
-          <p:cNvPr id="28" name="Text 26"/>
+          <p:cNvPr id="26" name="Text 24"/>
           <p:cNvSpPr/>
           <p:nvPr/>
         </p:nvSpPr>
@@ -2577,13 +2440,12 @@
             <a:avLst/>
           </a:prstGeom>
           <a:noFill/>
-          <a:ln/>
         </p:spPr>
         <p:txBody>
           <a:bodyPr wrap="square" rtlCol="0" anchor="ctr"/>
           <a:lstStyle/>
           <a:p>
-            <a:pPr algn="r" indent="0" marL="0">
+            <a:pPr marL="0" indent="0" algn="r">
               <a:buNone/>
             </a:pPr>
             <a:r>
@@ -2591,9 +2453,9 @@
                 <a:solidFill>
                   <a:srgbClr val="A3ABBD"/>
                 </a:solidFill>
-                <a:latin typeface="Segoe UI" pitchFamily="34" charset="0"/>
-                <a:ea typeface="Segoe UI" pitchFamily="34" charset="-122"/>
-                <a:cs typeface="Segoe UI" pitchFamily="34" charset="-120"/>
+                <a:latin typeface="Segoe UI" panose="020B0502040204020203" pitchFamily="34" charset="0"/>
+                <a:ea typeface="Segoe UI" panose="020B0502040204020203" pitchFamily="34" charset="-122"/>
+                <a:cs typeface="Segoe UI" panose="020B0502040204020203" pitchFamily="34" charset="-120"/>
               </a:rPr>
               <a:t>02 · Problème</a:t>
             </a:r>
@@ -2611,12 +2473,13 @@
 
 <file path=ppt/slides/slide3.xml><?xml version="1.0" encoding="utf-8"?>
 <p:sld xmlns:a="http://schemas.openxmlformats.org/drawingml/2006/main" xmlns:r="http://schemas.openxmlformats.org/officeDocument/2006/relationships" xmlns:p="http://schemas.openxmlformats.org/presentationml/2006/main">
-  <p:cSld name="Slide 3">
+  <p:cSld>
     <p:bg>
       <p:bgPr>
         <a:solidFill>
           <a:srgbClr val="14161C"/>
         </a:solidFill>
+        <a:effectLst/>
       </p:bgPr>
     </p:bg>
     <p:spTree>
@@ -2652,7 +2515,6 @@
               <a:alpha val="8000"/>
             </a:srgbClr>
           </a:solidFill>
-          <a:ln/>
         </p:spPr>
       </p:sp>
       <p:sp>
@@ -2669,7 +2531,6 @@
           <a:prstGeom prst="rect">
             <a:avLst/>
           </a:prstGeom>
-          <a:ln/>
         </p:spPr>
       </p:sp>
       <p:sp>
@@ -2687,13 +2548,12 @@
             <a:avLst/>
           </a:prstGeom>
           <a:noFill/>
-          <a:ln/>
         </p:spPr>
         <p:txBody>
           <a:bodyPr wrap="square" rtlCol="0" anchor="ctr"/>
           <a:lstStyle/>
           <a:p>
-            <a:pPr indent="0" marL="0">
+            <a:pPr marL="0" indent="0">
               <a:buNone/>
             </a:pPr>
             <a:r>
@@ -2701,9 +2561,9 @@
                 <a:solidFill>
                   <a:srgbClr val="F5F3EE"/>
                 </a:solidFill>
-                <a:latin typeface="Bahnschrift" pitchFamily="34" charset="0"/>
-                <a:ea typeface="Bahnschrift" pitchFamily="34" charset="-122"/>
-                <a:cs typeface="Bahnschrift" pitchFamily="34" charset="-120"/>
+                <a:latin typeface="Bahnschrift" panose="020B0502040204020203" pitchFamily="34" charset="0"/>
+                <a:ea typeface="Bahnschrift" panose="020B0502040204020203" pitchFamily="34" charset="-122"/>
+                <a:cs typeface="Bahnschrift" panose="020B0502040204020203" pitchFamily="34" charset="-120"/>
               </a:rPr>
               <a:t>Notre réponse directe</a:t>
             </a:r>
@@ -2726,13 +2586,12 @@
             <a:avLst/>
           </a:prstGeom>
           <a:noFill/>
-          <a:ln/>
         </p:spPr>
         <p:txBody>
           <a:bodyPr wrap="square" rtlCol="0" anchor="ctr"/>
           <a:lstStyle/>
           <a:p>
-            <a:pPr indent="0" marL="0">
+            <a:pPr marL="0" indent="0">
               <a:buNone/>
             </a:pPr>
             <a:r>
@@ -2740,9 +2599,9 @@
                 <a:solidFill>
                   <a:srgbClr val="A3ABBD"/>
                 </a:solidFill>
-                <a:latin typeface="Segoe UI" pitchFamily="34" charset="0"/>
-                <a:ea typeface="Segoe UI" pitchFamily="34" charset="-122"/>
-                <a:cs typeface="Segoe UI" pitchFamily="34" charset="-120"/>
+                <a:latin typeface="Segoe UI" panose="020B0502040204020203" pitchFamily="34" charset="0"/>
+                <a:ea typeface="Segoe UI" panose="020B0502040204020203" pitchFamily="34" charset="-122"/>
+                <a:cs typeface="Segoe UI" panose="020B0502040204020203" pitchFamily="34" charset="-120"/>
               </a:rPr>
               <a:t>Chaque problème identifié a une réponse produit concrète, déjà en code — pas un vœu pieux</a:t>
             </a:r>
@@ -2765,23 +2624,22 @@
             <a:avLst/>
           </a:prstGeom>
           <a:noFill/>
-          <a:ln/>
         </p:spPr>
         <p:txBody>
           <a:bodyPr wrap="square" rtlCol="0" anchor="ctr"/>
           <a:lstStyle/>
           <a:p>
-            <a:pPr algn="r" indent="0" marL="0">
-              <a:buNone/>
-            </a:pPr>
-            <a:r>
-              <a:rPr lang="en-US" sz="1100" b="1" spc="100" kern="0" dirty="0">
+            <a:pPr marL="0" indent="0" algn="r">
+              <a:buNone/>
+            </a:pPr>
+            <a:r>
+              <a:rPr lang="en-US" sz="1100" b="1" kern="0" spc="100" dirty="0">
                 <a:solidFill>
                   <a:srgbClr val="A3ABBD"/>
                 </a:solidFill>
-                <a:latin typeface="Bahnschrift" pitchFamily="34" charset="0"/>
-                <a:ea typeface="Bahnschrift" pitchFamily="34" charset="-122"/>
-                <a:cs typeface="Bahnschrift" pitchFamily="34" charset="-120"/>
+                <a:latin typeface="Bahnschrift" panose="020B0502040204020203" pitchFamily="34" charset="0"/>
+                <a:ea typeface="Bahnschrift" panose="020B0502040204020203" pitchFamily="34" charset="-122"/>
+                <a:cs typeface="Bahnschrift" panose="020B0502040204020203" pitchFamily="34" charset="-120"/>
               </a:rPr>
               <a:t>CESTOMCLASH228</a:t>
             </a:r>
@@ -2814,7 +2672,7 @@
             <a:prstDash val="solid"/>
           </a:ln>
           <a:effectLst>
-            <a:outerShdw sx="100000" sy="100000" kx="0" ky="0" algn="bl" rotWithShape="0" blurRad="101600" dist="50800" dir="16200000">
+            <a:outerShdw blurRad="101600" dist="50800" dir="16200000" algn="bl" rotWithShape="0">
               <a:srgbClr val="2FE894">
                 <a:alpha val="28000"/>
               </a:srgbClr>
@@ -2841,7 +2699,6 @@
               <a:alpha val="65000"/>
             </a:srgbClr>
           </a:solidFill>
-          <a:ln/>
         </p:spPr>
       </p:sp>
       <p:sp>
@@ -2861,9 +2718,8 @@
           <a:solidFill>
             <a:srgbClr val="2FE894"/>
           </a:solidFill>
-          <a:ln/>
           <a:effectLst>
-            <a:outerShdw sx="100000" sy="100000" kx="0" ky="0" algn="bl" rotWithShape="0" blurRad="76200" dist="50800" dir="16200000">
+            <a:outerShdw blurRad="76200" dist="50800" dir="16200000" algn="bl" rotWithShape="0">
               <a:srgbClr val="2FE894">
                 <a:alpha val="50000"/>
               </a:srgbClr>
@@ -2886,27 +2742,26 @@
             <a:avLst/>
           </a:prstGeom>
           <a:noFill/>
-          <a:ln/>
         </p:spPr>
         <p:txBody>
           <a:bodyPr wrap="square" rtlCol="0" anchor="ctr"/>
           <a:lstStyle/>
           <a:p>
-            <a:pPr algn="ctr" indent="0" marL="0">
-              <a:buNone/>
-            </a:pPr>
-            <a:r>
-              <a:rPr lang="en-US" sz="1408" b="1" dirty="0">
+            <a:pPr marL="0" indent="0" algn="ctr">
+              <a:buNone/>
+            </a:pPr>
+            <a:r>
+              <a:rPr lang="en-US" sz="1410" b="1" dirty="0">
                 <a:solidFill>
                   <a:srgbClr val="14161C"/>
                 </a:solidFill>
-                <a:latin typeface="Bahnschrift" pitchFamily="34" charset="0"/>
-                <a:ea typeface="Bahnschrift" pitchFamily="34" charset="-122"/>
-                <a:cs typeface="Bahnschrift" pitchFamily="34" charset="-120"/>
+                <a:latin typeface="Bahnschrift" panose="020B0502040204020203" pitchFamily="34" charset="0"/>
+                <a:ea typeface="Bahnschrift" panose="020B0502040204020203" pitchFamily="34" charset="-122"/>
+                <a:cs typeface="Bahnschrift" panose="020B0502040204020203" pitchFamily="34" charset="-120"/>
               </a:rPr>
               <a:t>+</a:t>
             </a:r>
-            <a:endParaRPr lang="en-US" sz="1408" dirty="0"/>
+            <a:endParaRPr lang="en-US" sz="1410" dirty="0"/>
           </a:p>
         </p:txBody>
       </p:sp>
@@ -2925,13 +2780,12 @@
             <a:avLst/>
           </a:prstGeom>
           <a:noFill/>
-          <a:ln/>
         </p:spPr>
         <p:txBody>
           <a:bodyPr wrap="square" rtlCol="0" anchor="t"/>
           <a:lstStyle/>
           <a:p>
-            <a:pPr indent="0" marL="0">
+            <a:pPr marL="0" indent="0">
               <a:buNone/>
             </a:pPr>
             <a:r>
@@ -2939,9 +2793,9 @@
                 <a:solidFill>
                   <a:srgbClr val="2FE894"/>
                 </a:solidFill>
-                <a:latin typeface="Bahnschrift" pitchFamily="34" charset="0"/>
-                <a:ea typeface="Bahnschrift" pitchFamily="34" charset="-122"/>
-                <a:cs typeface="Bahnschrift" pitchFamily="34" charset="-120"/>
+                <a:latin typeface="Bahnschrift" panose="020B0502040204020203" pitchFamily="34" charset="0"/>
+                <a:ea typeface="Bahnschrift" panose="020B0502040204020203" pitchFamily="34" charset="-122"/>
+                <a:cs typeface="Bahnschrift" panose="020B0502040204020203" pitchFamily="34" charset="-120"/>
               </a:rPr>
               <a:t>Carte par ville + Pins</a:t>
             </a:r>
@@ -2964,13 +2818,12 @@
             <a:avLst/>
           </a:prstGeom>
           <a:noFill/>
-          <a:ln/>
         </p:spPr>
         <p:txBody>
           <a:bodyPr wrap="square" rtlCol="0" anchor="t"/>
           <a:lstStyle/>
           <a:p>
-            <a:pPr indent="0" marL="0">
+            <a:pPr marL="0" indent="0">
               <a:lnSpc>
                 <a:spcPct val="125000"/>
               </a:lnSpc>
@@ -2981,9 +2834,9 @@
                 <a:solidFill>
                   <a:srgbClr val="A3ABBD"/>
                 </a:solidFill>
-                <a:latin typeface="Segoe UI" pitchFamily="34" charset="0"/>
-                <a:ea typeface="Segoe UI" pitchFamily="34" charset="-122"/>
-                <a:cs typeface="Segoe UI" pitchFamily="34" charset="-120"/>
+                <a:latin typeface="Segoe UI" panose="020B0502040204020203" pitchFamily="34" charset="0"/>
+                <a:ea typeface="Segoe UI" panose="020B0502040204020203" pitchFamily="34" charset="-122"/>
+                <a:cs typeface="Segoe UI" panose="020B0502040204020203" pitchFamily="34" charset="-120"/>
               </a:rPr>
               <a:t>Informations pratiques persistantes, consultables par tous, ancrées à un lieu précis.</a:t>
             </a:r>
@@ -3016,7 +2869,7 @@
             <a:prstDash val="solid"/>
           </a:ln>
           <a:effectLst>
-            <a:outerShdw sx="100000" sy="100000" kx="0" ky="0" algn="bl" rotWithShape="0" blurRad="101600" dist="50800" dir="16200000">
+            <a:outerShdw blurRad="101600" dist="50800" dir="16200000" algn="bl" rotWithShape="0">
               <a:srgbClr val="2FE894">
                 <a:alpha val="28000"/>
               </a:srgbClr>
@@ -3043,7 +2896,6 @@
               <a:alpha val="65000"/>
             </a:srgbClr>
           </a:solidFill>
-          <a:ln/>
         </p:spPr>
       </p:sp>
       <p:sp>
@@ -3063,9 +2915,8 @@
           <a:solidFill>
             <a:srgbClr val="2FE894"/>
           </a:solidFill>
-          <a:ln/>
           <a:effectLst>
-            <a:outerShdw sx="100000" sy="100000" kx="0" ky="0" algn="bl" rotWithShape="0" blurRad="76200" dist="50800" dir="16200000">
+            <a:outerShdw blurRad="76200" dist="50800" dir="16200000" algn="bl" rotWithShape="0">
               <a:srgbClr val="2FE894">
                 <a:alpha val="50000"/>
               </a:srgbClr>
@@ -3088,27 +2939,26 @@
             <a:avLst/>
           </a:prstGeom>
           <a:noFill/>
-          <a:ln/>
         </p:spPr>
         <p:txBody>
           <a:bodyPr wrap="square" rtlCol="0" anchor="ctr"/>
           <a:lstStyle/>
           <a:p>
-            <a:pPr algn="ctr" indent="0" marL="0">
-              <a:buNone/>
-            </a:pPr>
-            <a:r>
-              <a:rPr lang="en-US" sz="1408" b="1" dirty="0">
+            <a:pPr marL="0" indent="0" algn="ctr">
+              <a:buNone/>
+            </a:pPr>
+            <a:r>
+              <a:rPr lang="en-US" sz="1410" b="1" dirty="0">
                 <a:solidFill>
                   <a:srgbClr val="14161C"/>
                 </a:solidFill>
-                <a:latin typeface="Bahnschrift" pitchFamily="34" charset="0"/>
-                <a:ea typeface="Bahnschrift" pitchFamily="34" charset="-122"/>
-                <a:cs typeface="Bahnschrift" pitchFamily="34" charset="-120"/>
+                <a:latin typeface="Bahnschrift" panose="020B0502040204020203" pitchFamily="34" charset="0"/>
+                <a:ea typeface="Bahnschrift" panose="020B0502040204020203" pitchFamily="34" charset="-122"/>
+                <a:cs typeface="Bahnschrift" panose="020B0502040204020203" pitchFamily="34" charset="-120"/>
               </a:rPr>
               <a:t>+</a:t>
             </a:r>
-            <a:endParaRPr lang="en-US" sz="1408" dirty="0"/>
+            <a:endParaRPr lang="en-US" sz="1410" dirty="0"/>
           </a:p>
         </p:txBody>
       </p:sp>
@@ -3127,13 +2977,12 @@
             <a:avLst/>
           </a:prstGeom>
           <a:noFill/>
-          <a:ln/>
         </p:spPr>
         <p:txBody>
           <a:bodyPr wrap="square" rtlCol="0" anchor="t"/>
           <a:lstStyle/>
           <a:p>
-            <a:pPr indent="0" marL="0">
+            <a:pPr marL="0" indent="0">
               <a:buNone/>
             </a:pPr>
             <a:r>
@@ -3141,9 +2990,9 @@
                 <a:solidFill>
                   <a:srgbClr val="2FE894"/>
                 </a:solidFill>
-                <a:latin typeface="Bahnschrift" pitchFamily="34" charset="0"/>
-                <a:ea typeface="Bahnschrift" pitchFamily="34" charset="-122"/>
-                <a:cs typeface="Bahnschrift" pitchFamily="34" charset="-120"/>
+                <a:latin typeface="Bahnschrift" panose="020B0502040204020203" pitchFamily="34" charset="0"/>
+                <a:ea typeface="Bahnschrift" panose="020B0502040204020203" pitchFamily="34" charset="-122"/>
+                <a:cs typeface="Bahnschrift" panose="020B0502040204020203" pitchFamily="34" charset="-120"/>
               </a:rPr>
               <a:t>Bounties + Notation</a:t>
             </a:r>
@@ -3166,13 +3015,12 @@
             <a:avLst/>
           </a:prstGeom>
           <a:noFill/>
-          <a:ln/>
         </p:spPr>
         <p:txBody>
           <a:bodyPr wrap="square" rtlCol="0" anchor="t"/>
           <a:lstStyle/>
           <a:p>
-            <a:pPr indent="0" marL="0">
+            <a:pPr marL="0" indent="0">
               <a:lnSpc>
                 <a:spcPct val="125000"/>
               </a:lnSpc>
@@ -3183,11 +3031,11 @@
                 <a:solidFill>
                   <a:srgbClr val="A3ABBD"/>
                 </a:solidFill>
-                <a:latin typeface="Segoe UI" pitchFamily="34" charset="0"/>
-                <a:ea typeface="Segoe UI" pitchFamily="34" charset="-122"/>
-                <a:cs typeface="Segoe UI" pitchFamily="34" charset="-120"/>
-              </a:rPr>
-              <a:t>Demande d'aide résolue → note publique (1-5) → réputation qui se construit dans la durée.</a:t>
+                <a:latin typeface="Segoe UI" panose="020B0502040204020203" pitchFamily="34" charset="0"/>
+                <a:ea typeface="Segoe UI" panose="020B0502040204020203" pitchFamily="34" charset="-122"/>
+                <a:cs typeface="Segoe UI" panose="020B0502040204020203" pitchFamily="34" charset="-120"/>
+              </a:rPr>
+              <a:t>Une demande récurrente devient un service proposé → réputation qui se construit dans la durée.</a:t>
             </a:r>
             <a:endParaRPr lang="en-US" sz="1100" dirty="0"/>
           </a:p>
@@ -3218,7 +3066,7 @@
             <a:prstDash val="solid"/>
           </a:ln>
           <a:effectLst>
-            <a:outerShdw sx="100000" sy="100000" kx="0" ky="0" algn="bl" rotWithShape="0" blurRad="101600" dist="50800" dir="16200000">
+            <a:outerShdw blurRad="101600" dist="50800" dir="16200000" algn="bl" rotWithShape="0">
               <a:srgbClr val="2FE894">
                 <a:alpha val="28000"/>
               </a:srgbClr>
@@ -3245,7 +3093,6 @@
               <a:alpha val="65000"/>
             </a:srgbClr>
           </a:solidFill>
-          <a:ln/>
         </p:spPr>
       </p:sp>
       <p:sp>
@@ -3265,9 +3112,8 @@
           <a:solidFill>
             <a:srgbClr val="2FE894"/>
           </a:solidFill>
-          <a:ln/>
           <a:effectLst>
-            <a:outerShdw sx="100000" sy="100000" kx="0" ky="0" algn="bl" rotWithShape="0" blurRad="76200" dist="50800" dir="16200000">
+            <a:outerShdw blurRad="76200" dist="50800" dir="16200000" algn="bl" rotWithShape="0">
               <a:srgbClr val="2FE894">
                 <a:alpha val="50000"/>
               </a:srgbClr>
@@ -3290,27 +3136,26 @@
             <a:avLst/>
           </a:prstGeom>
           <a:noFill/>
-          <a:ln/>
         </p:spPr>
         <p:txBody>
           <a:bodyPr wrap="square" rtlCol="0" anchor="ctr"/>
           <a:lstStyle/>
           <a:p>
-            <a:pPr algn="ctr" indent="0" marL="0">
-              <a:buNone/>
-            </a:pPr>
-            <a:r>
-              <a:rPr lang="en-US" sz="1408" b="1" dirty="0">
+            <a:pPr marL="0" indent="0" algn="ctr">
+              <a:buNone/>
+            </a:pPr>
+            <a:r>
+              <a:rPr lang="en-US" sz="1410" b="1" dirty="0">
                 <a:solidFill>
                   <a:srgbClr val="14161C"/>
                 </a:solidFill>
-                <a:latin typeface="Bahnschrift" pitchFamily="34" charset="0"/>
-                <a:ea typeface="Bahnschrift" pitchFamily="34" charset="-122"/>
-                <a:cs typeface="Bahnschrift" pitchFamily="34" charset="-120"/>
+                <a:latin typeface="Bahnschrift" panose="020B0502040204020203" pitchFamily="34" charset="0"/>
+                <a:ea typeface="Bahnschrift" panose="020B0502040204020203" pitchFamily="34" charset="-122"/>
+                <a:cs typeface="Bahnschrift" panose="020B0502040204020203" pitchFamily="34" charset="-120"/>
               </a:rPr>
               <a:t>+</a:t>
             </a:r>
-            <a:endParaRPr lang="en-US" sz="1408" dirty="0"/>
+            <a:endParaRPr lang="en-US" sz="1410" dirty="0"/>
           </a:p>
         </p:txBody>
       </p:sp>
@@ -3329,13 +3174,12 @@
             <a:avLst/>
           </a:prstGeom>
           <a:noFill/>
-          <a:ln/>
         </p:spPr>
         <p:txBody>
           <a:bodyPr wrap="square" rtlCol="0" anchor="t"/>
           <a:lstStyle/>
           <a:p>
-            <a:pPr indent="0" marL="0">
+            <a:pPr marL="0" indent="0">
               <a:buNone/>
             </a:pPr>
             <a:r>
@@ -3343,11 +3187,11 @@
                 <a:solidFill>
                   <a:srgbClr val="2FE894"/>
                 </a:solidFill>
-                <a:latin typeface="Bahnschrift" pitchFamily="34" charset="0"/>
-                <a:ea typeface="Bahnschrift" pitchFamily="34" charset="-122"/>
-                <a:cs typeface="Bahnschrift" pitchFamily="34" charset="-120"/>
-              </a:rPr>
-              <a:t>Ancrage CESTOM</a:t>
+                <a:latin typeface="Bahnschrift" panose="020B0502040204020203" pitchFamily="34" charset="0"/>
+                <a:ea typeface="Bahnschrift" panose="020B0502040204020203" pitchFamily="34" charset="-122"/>
+                <a:cs typeface="Bahnschrift" panose="020B0502040204020203" pitchFamily="34" charset="-120"/>
+              </a:rPr>
+              <a:t>Communauté, pas une app de plus</a:t>
             </a:r>
             <a:endParaRPr lang="en-US" sz="1350" dirty="0"/>
           </a:p>
@@ -3368,13 +3212,12 @@
             <a:avLst/>
           </a:prstGeom>
           <a:noFill/>
-          <a:ln/>
         </p:spPr>
         <p:txBody>
           <a:bodyPr wrap="square" rtlCol="0" anchor="t"/>
           <a:lstStyle/>
           <a:p>
-            <a:pPr indent="0" marL="0">
+            <a:pPr marL="0" indent="0">
               <a:lnSpc>
                 <a:spcPct val="125000"/>
               </a:lnSpc>
@@ -3385,11 +3228,11 @@
                 <a:solidFill>
                   <a:srgbClr val="A3ABBD"/>
                 </a:solidFill>
-                <a:latin typeface="Segoe UI" pitchFamily="34" charset="0"/>
-                <a:ea typeface="Segoe UI" pitchFamily="34" charset="-122"/>
-                <a:cs typeface="Segoe UI" pitchFamily="34" charset="-120"/>
-              </a:rPr>
-              <a:t>Porté par une communauté déjà organisée sur le terrain — pas une app anonyme de plus.</a:t>
+                <a:latin typeface="Segoe UI" panose="020B0502040204020203" pitchFamily="34" charset="0"/>
+                <a:ea typeface="Segoe UI" panose="020B0502040204020203" pitchFamily="34" charset="-122"/>
+                <a:cs typeface="Segoe UI" panose="020B0502040204020203" pitchFamily="34" charset="-120"/>
+              </a:rPr>
+              <a:t>Pensé pour une communauté précise — discussion en langues locales, notion d'appartenance.</a:t>
             </a:r>
             <a:endParaRPr lang="en-US" sz="1100" dirty="0"/>
           </a:p>
@@ -3412,9 +3255,8 @@
           <a:solidFill>
             <a:srgbClr val="3FE0FF"/>
           </a:solidFill>
-          <a:ln/>
           <a:effectLst>
-            <a:outerShdw sx="100000" sy="100000" kx="0" ky="0" algn="bl" rotWithShape="0" blurRad="76200" dist="50800" dir="16200000">
+            <a:outerShdw blurRad="76200" dist="50800" dir="16200000" algn="bl" rotWithShape="0">
               <a:srgbClr val="3FE0FF">
                 <a:alpha val="50000"/>
               </a:srgbClr>
@@ -3437,27 +3279,26 @@
             <a:avLst/>
           </a:prstGeom>
           <a:noFill/>
-          <a:ln/>
         </p:spPr>
         <p:txBody>
           <a:bodyPr wrap="square" rtlCol="0" anchor="ctr"/>
           <a:lstStyle/>
           <a:p>
-            <a:pPr algn="ctr" indent="0" marL="0">
-              <a:buNone/>
-            </a:pPr>
-            <a:r>
-              <a:rPr lang="en-US" sz="2464" b="1" dirty="0">
+            <a:pPr marL="0" indent="0" algn="ctr">
+              <a:buNone/>
+            </a:pPr>
+            <a:r>
+              <a:rPr lang="en-US" sz="2465" b="1" dirty="0">
                 <a:solidFill>
                   <a:srgbClr val="14161C"/>
                 </a:solidFill>
-                <a:latin typeface="Bahnschrift" pitchFamily="34" charset="0"/>
-                <a:ea typeface="Bahnschrift" pitchFamily="34" charset="-122"/>
-                <a:cs typeface="Bahnschrift" pitchFamily="34" charset="-120"/>
+                <a:latin typeface="Bahnschrift" panose="020B0502040204020203" pitchFamily="34" charset="0"/>
+                <a:ea typeface="Bahnschrift" panose="020B0502040204020203" pitchFamily="34" charset="-122"/>
+                <a:cs typeface="Bahnschrift" panose="020B0502040204020203" pitchFamily="34" charset="-120"/>
               </a:rPr>
               <a:t>1</a:t>
             </a:r>
-            <a:endParaRPr lang="en-US" sz="2464" dirty="0"/>
+            <a:endParaRPr lang="en-US" sz="2465" dirty="0"/>
           </a:p>
         </p:txBody>
       </p:sp>
@@ -3476,13 +3317,12 @@
             <a:avLst/>
           </a:prstGeom>
           <a:noFill/>
-          <a:ln/>
         </p:spPr>
         <p:txBody>
           <a:bodyPr wrap="square" rtlCol="0" anchor="ctr"/>
           <a:lstStyle/>
           <a:p>
-            <a:pPr algn="ctr" indent="0" marL="0">
+            <a:pPr marL="0" indent="0" algn="ctr">
               <a:buNone/>
             </a:pPr>
             <a:r>
@@ -3490,9 +3330,9 @@
                 <a:solidFill>
                   <a:srgbClr val="F5F3EE"/>
                 </a:solidFill>
-                <a:latin typeface="Bahnschrift" pitchFamily="34" charset="0"/>
-                <a:ea typeface="Bahnschrift" pitchFamily="34" charset="-122"/>
-                <a:cs typeface="Bahnschrift" pitchFamily="34" charset="-120"/>
+                <a:latin typeface="Bahnschrift" panose="020B0502040204020203" pitchFamily="34" charset="0"/>
+                <a:ea typeface="Bahnschrift" panose="020B0502040204020203" pitchFamily="34" charset="-122"/>
+                <a:cs typeface="Bahnschrift" panose="020B0502040204020203" pitchFamily="34" charset="-120"/>
               </a:rPr>
               <a:t>Explore</a:t>
             </a:r>
@@ -3540,9 +3380,8 @@
           <a:solidFill>
             <a:srgbClr val="FFC94D"/>
           </a:solidFill>
-          <a:ln/>
           <a:effectLst>
-            <a:outerShdw sx="100000" sy="100000" kx="0" ky="0" algn="bl" rotWithShape="0" blurRad="76200" dist="50800" dir="16200000">
+            <a:outerShdw blurRad="76200" dist="50800" dir="16200000" algn="bl" rotWithShape="0">
               <a:srgbClr val="FFC94D">
                 <a:alpha val="50000"/>
               </a:srgbClr>
@@ -3565,27 +3404,26 @@
             <a:avLst/>
           </a:prstGeom>
           <a:noFill/>
-          <a:ln/>
         </p:spPr>
         <p:txBody>
           <a:bodyPr wrap="square" rtlCol="0" anchor="ctr"/>
           <a:lstStyle/>
           <a:p>
-            <a:pPr algn="ctr" indent="0" marL="0">
-              <a:buNone/>
-            </a:pPr>
-            <a:r>
-              <a:rPr lang="en-US" sz="2464" b="1" dirty="0">
+            <a:pPr marL="0" indent="0" algn="ctr">
+              <a:buNone/>
+            </a:pPr>
+            <a:r>
+              <a:rPr lang="en-US" sz="2465" b="1" dirty="0">
                 <a:solidFill>
                   <a:srgbClr val="14161C"/>
                 </a:solidFill>
-                <a:latin typeface="Bahnschrift" pitchFamily="34" charset="0"/>
-                <a:ea typeface="Bahnschrift" pitchFamily="34" charset="-122"/>
-                <a:cs typeface="Bahnschrift" pitchFamily="34" charset="-120"/>
+                <a:latin typeface="Bahnschrift" panose="020B0502040204020203" pitchFamily="34" charset="0"/>
+                <a:ea typeface="Bahnschrift" panose="020B0502040204020203" pitchFamily="34" charset="-122"/>
+                <a:cs typeface="Bahnschrift" panose="020B0502040204020203" pitchFamily="34" charset="-120"/>
               </a:rPr>
               <a:t>2</a:t>
             </a:r>
-            <a:endParaRPr lang="en-US" sz="2464" dirty="0"/>
+            <a:endParaRPr lang="en-US" sz="2465" dirty="0"/>
           </a:p>
         </p:txBody>
       </p:sp>
@@ -3604,13 +3442,12 @@
             <a:avLst/>
           </a:prstGeom>
           <a:noFill/>
-          <a:ln/>
         </p:spPr>
         <p:txBody>
           <a:bodyPr wrap="square" rtlCol="0" anchor="ctr"/>
           <a:lstStyle/>
           <a:p>
-            <a:pPr algn="ctr" indent="0" marL="0">
+            <a:pPr marL="0" indent="0" algn="ctr">
               <a:buNone/>
             </a:pPr>
             <a:r>
@@ -3618,9 +3455,9 @@
                 <a:solidFill>
                   <a:srgbClr val="F5F3EE"/>
                 </a:solidFill>
-                <a:latin typeface="Bahnschrift" pitchFamily="34" charset="0"/>
-                <a:ea typeface="Bahnschrift" pitchFamily="34" charset="-122"/>
-                <a:cs typeface="Bahnschrift" pitchFamily="34" charset="-120"/>
+                <a:latin typeface="Bahnschrift" panose="020B0502040204020203" pitchFamily="34" charset="0"/>
+                <a:ea typeface="Bahnschrift" panose="020B0502040204020203" pitchFamily="34" charset="-122"/>
+                <a:cs typeface="Bahnschrift" panose="020B0502040204020203" pitchFamily="34" charset="-120"/>
               </a:rPr>
               <a:t>Partage</a:t>
             </a:r>
@@ -3668,9 +3505,8 @@
           <a:solidFill>
             <a:srgbClr val="2FE894"/>
           </a:solidFill>
-          <a:ln/>
           <a:effectLst>
-            <a:outerShdw sx="100000" sy="100000" kx="0" ky="0" algn="bl" rotWithShape="0" blurRad="76200" dist="50800" dir="16200000">
+            <a:outerShdw blurRad="76200" dist="50800" dir="16200000" algn="bl" rotWithShape="0">
               <a:srgbClr val="2FE894">
                 <a:alpha val="50000"/>
               </a:srgbClr>
@@ -3693,27 +3529,26 @@
             <a:avLst/>
           </a:prstGeom>
           <a:noFill/>
-          <a:ln/>
         </p:spPr>
         <p:txBody>
           <a:bodyPr wrap="square" rtlCol="0" anchor="ctr"/>
           <a:lstStyle/>
           <a:p>
-            <a:pPr algn="ctr" indent="0" marL="0">
-              <a:buNone/>
-            </a:pPr>
-            <a:r>
-              <a:rPr lang="en-US" sz="2464" b="1" dirty="0">
+            <a:pPr marL="0" indent="0" algn="ctr">
+              <a:buNone/>
+            </a:pPr>
+            <a:r>
+              <a:rPr lang="en-US" sz="2465" b="1" dirty="0">
                 <a:solidFill>
                   <a:srgbClr val="14161C"/>
                 </a:solidFill>
-                <a:latin typeface="Bahnschrift" pitchFamily="34" charset="0"/>
-                <a:ea typeface="Bahnschrift" pitchFamily="34" charset="-122"/>
-                <a:cs typeface="Bahnschrift" pitchFamily="34" charset="-120"/>
+                <a:latin typeface="Bahnschrift" panose="020B0502040204020203" pitchFamily="34" charset="0"/>
+                <a:ea typeface="Bahnschrift" panose="020B0502040204020203" pitchFamily="34" charset="-122"/>
+                <a:cs typeface="Bahnschrift" panose="020B0502040204020203" pitchFamily="34" charset="-120"/>
               </a:rPr>
               <a:t>3</a:t>
             </a:r>
-            <a:endParaRPr lang="en-US" sz="2464" dirty="0"/>
+            <a:endParaRPr lang="en-US" sz="2465" dirty="0"/>
           </a:p>
         </p:txBody>
       </p:sp>
@@ -3732,13 +3567,12 @@
             <a:avLst/>
           </a:prstGeom>
           <a:noFill/>
-          <a:ln/>
         </p:spPr>
         <p:txBody>
           <a:bodyPr wrap="square" rtlCol="0" anchor="ctr"/>
           <a:lstStyle/>
           <a:p>
-            <a:pPr algn="ctr" indent="0" marL="0">
+            <a:pPr marL="0" indent="0" algn="ctr">
               <a:buNone/>
             </a:pPr>
             <a:r>
@@ -3746,9 +3580,9 @@
                 <a:solidFill>
                   <a:srgbClr val="F5F3EE"/>
                 </a:solidFill>
-                <a:latin typeface="Bahnschrift" pitchFamily="34" charset="0"/>
-                <a:ea typeface="Bahnschrift" pitchFamily="34" charset="-122"/>
-                <a:cs typeface="Bahnschrift" pitchFamily="34" charset="-120"/>
+                <a:latin typeface="Bahnschrift" panose="020B0502040204020203" pitchFamily="34" charset="0"/>
+                <a:ea typeface="Bahnschrift" panose="020B0502040204020203" pitchFamily="34" charset="-122"/>
+                <a:cs typeface="Bahnschrift" panose="020B0502040204020203" pitchFamily="34" charset="-120"/>
               </a:rPr>
               <a:t>Level-up</a:t>
             </a:r>
@@ -3771,13 +3605,12 @@
             <a:avLst/>
           </a:prstGeom>
           <a:noFill/>
-          <a:ln/>
         </p:spPr>
         <p:txBody>
           <a:bodyPr wrap="square" rtlCol="0" anchor="ctr"/>
           <a:lstStyle/>
           <a:p>
-            <a:pPr algn="ctr" indent="0" marL="0">
+            <a:pPr marL="0" indent="0" algn="ctr">
               <a:buNone/>
             </a:pPr>
             <a:r>
@@ -3785,9 +3618,9 @@
                 <a:solidFill>
                   <a:srgbClr val="A3ABBD"/>
                 </a:solidFill>
-                <a:latin typeface="Segoe UI" pitchFamily="34" charset="0"/>
-                <a:ea typeface="Segoe UI" pitchFamily="34" charset="-122"/>
-                <a:cs typeface="Segoe UI" pitchFamily="34" charset="-120"/>
+                <a:latin typeface="Segoe UI" panose="020B0502040204020203" pitchFamily="34" charset="0"/>
+                <a:ea typeface="Segoe UI" panose="020B0502040204020203" pitchFamily="34" charset="-122"/>
+                <a:cs typeface="Segoe UI" panose="020B0502040204020203" pitchFamily="34" charset="-120"/>
               </a:rPr>
               <a:t>De la première visite à la réputation construite — zéro friction.</a:t>
             </a:r>
@@ -3810,37 +3643,33 @@
             <a:avLst/>
           </a:prstGeom>
           <a:noFill/>
-          <a:ln/>
         </p:spPr>
         <p:txBody>
           <a:bodyPr wrap="square" rtlCol="0" anchor="ctr"/>
           <a:lstStyle/>
           <a:p>
-            <a:pPr indent="0" marL="0">
-              <a:buNone/>
-            </a:pPr>
-            <a:r>
-              <a:rPr lang="en-US" sz="1000" b="1" spc="100" kern="0" dirty="0">
+            <a:pPr marL="0" indent="0">
+              <a:buNone/>
+            </a:pPr>
+            <a:r>
+              <a:rPr lang="en-US" sz="1000" b="1" kern="0" spc="100" dirty="0">
                 <a:solidFill>
                   <a:srgbClr val="A3ABBD"/>
                 </a:solidFill>
-                <a:latin typeface="Bahnschrift" pitchFamily="34" charset="0"/>
-                <a:ea typeface="Bahnschrift" pitchFamily="34" charset="-122"/>
-                <a:cs typeface="Bahnschrift" pitchFamily="34" charset="-120"/>
+                <a:latin typeface="Bahnschrift" panose="020B0502040204020203" pitchFamily="34" charset="0"/>
+                <a:ea typeface="Bahnschrift" panose="020B0502040204020203" pitchFamily="34" charset="-122"/>
+                <a:cs typeface="Bahnschrift" panose="020B0502040204020203" pitchFamily="34" charset="-120"/>
               </a:rPr>
               <a:t>CESTOMCLASH228  </a:t>
             </a:r>
-            <a:pPr indent="0" marL="0">
-              <a:buNone/>
-            </a:pPr>
-            <a:r>
-              <a:rPr lang="en-US" sz="1000" spc="100" kern="0" dirty="0">
+            <a:r>
+              <a:rPr lang="en-US" sz="1000" kern="0" spc="100" dirty="0">
                 <a:solidFill>
                   <a:srgbClr val="A3ABBD"/>
                 </a:solidFill>
-                <a:latin typeface="Bahnschrift" pitchFamily="34" charset="0"/>
-                <a:ea typeface="Bahnschrift" pitchFamily="34" charset="-122"/>
-                <a:cs typeface="Bahnschrift" pitchFamily="34" charset="-120"/>
+                <a:latin typeface="Bahnschrift" panose="020B0502040204020203" pitchFamily="34" charset="0"/>
+                <a:ea typeface="Bahnschrift" panose="020B0502040204020203" pitchFamily="34" charset="-122"/>
+                <a:cs typeface="Bahnschrift" panose="020B0502040204020203" pitchFamily="34" charset="-120"/>
               </a:rPr>
               <a:t>· Explore. Partage. Level-up.</a:t>
             </a:r>
@@ -3863,13 +3692,12 @@
             <a:avLst/>
           </a:prstGeom>
           <a:noFill/>
-          <a:ln/>
         </p:spPr>
         <p:txBody>
           <a:bodyPr wrap="square" rtlCol="0" anchor="ctr"/>
           <a:lstStyle/>
           <a:p>
-            <a:pPr algn="r" indent="0" marL="0">
+            <a:pPr marL="0" indent="0" algn="r">
               <a:buNone/>
             </a:pPr>
             <a:r>
@@ -3877,9 +3705,9 @@
                 <a:solidFill>
                   <a:srgbClr val="A3ABBD"/>
                 </a:solidFill>
-                <a:latin typeface="Segoe UI" pitchFamily="34" charset="0"/>
-                <a:ea typeface="Segoe UI" pitchFamily="34" charset="-122"/>
-                <a:cs typeface="Segoe UI" pitchFamily="34" charset="-120"/>
+                <a:latin typeface="Segoe UI" panose="020B0502040204020203" pitchFamily="34" charset="0"/>
+                <a:ea typeface="Segoe UI" panose="020B0502040204020203" pitchFamily="34" charset="-122"/>
+                <a:cs typeface="Segoe UI" panose="020B0502040204020203" pitchFamily="34" charset="-120"/>
               </a:rPr>
               <a:t>03 · Solution</a:t>
             </a:r>
@@ -3897,12 +3725,13 @@
 
 <file path=ppt/slides/slide4.xml><?xml version="1.0" encoding="utf-8"?>
 <p:sld xmlns:a="http://schemas.openxmlformats.org/drawingml/2006/main" xmlns:r="http://schemas.openxmlformats.org/officeDocument/2006/relationships" xmlns:p="http://schemas.openxmlformats.org/presentationml/2006/main">
-  <p:cSld name="Slide 4">
+  <p:cSld>
     <p:bg>
       <p:bgPr>
         <a:solidFill>
           <a:srgbClr val="14161C"/>
         </a:solidFill>
+        <a:effectLst/>
       </p:bgPr>
     </p:bg>
     <p:spTree>
@@ -3938,7 +3767,6 @@
               <a:alpha val="8000"/>
             </a:srgbClr>
           </a:solidFill>
-          <a:ln/>
         </p:spPr>
       </p:sp>
       <p:sp>
@@ -3955,7 +3783,6 @@
           <a:prstGeom prst="rect">
             <a:avLst/>
           </a:prstGeom>
-          <a:ln/>
         </p:spPr>
       </p:sp>
       <p:sp>
@@ -3973,13 +3800,12 @@
             <a:avLst/>
           </a:prstGeom>
           <a:noFill/>
-          <a:ln/>
         </p:spPr>
         <p:txBody>
           <a:bodyPr wrap="square" rtlCol="0" anchor="ctr"/>
           <a:lstStyle/>
           <a:p>
-            <a:pPr indent="0" marL="0">
+            <a:pPr marL="0" indent="0">
               <a:buNone/>
             </a:pPr>
             <a:r>
@@ -3987,9 +3813,9 @@
                 <a:solidFill>
                   <a:srgbClr val="F5F3EE"/>
                 </a:solidFill>
-                <a:latin typeface="Bahnschrift" pitchFamily="34" charset="0"/>
-                <a:ea typeface="Bahnschrift" pitchFamily="34" charset="-122"/>
-                <a:cs typeface="Bahnschrift" pitchFamily="34" charset="-120"/>
+                <a:latin typeface="Bahnschrift" panose="020B0502040204020203" pitchFamily="34" charset="0"/>
+                <a:ea typeface="Bahnschrift" panose="020B0502040204020203" pitchFamily="34" charset="-122"/>
+                <a:cs typeface="Bahnschrift" panose="020B0502040204020203" pitchFamily="34" charset="-120"/>
               </a:rPr>
               <a:t>Business case : l'impact d'abord, prouvé dès le jour 1</a:t>
             </a:r>
@@ -4012,13 +3838,12 @@
             <a:avLst/>
           </a:prstGeom>
           <a:noFill/>
-          <a:ln/>
         </p:spPr>
         <p:txBody>
           <a:bodyPr wrap="square" rtlCol="0" anchor="ctr"/>
           <a:lstStyle/>
           <a:p>
-            <a:pPr indent="0" marL="0">
+            <a:pPr marL="0" indent="0">
               <a:buNone/>
             </a:pPr>
             <a:r>
@@ -4026,9 +3851,9 @@
                 <a:solidFill>
                   <a:srgbClr val="A3ABBD"/>
                 </a:solidFill>
-                <a:latin typeface="Segoe UI" pitchFamily="34" charset="0"/>
-                <a:ea typeface="Segoe UI" pitchFamily="34" charset="-122"/>
-                <a:cs typeface="Segoe UI" pitchFamily="34" charset="-120"/>
+                <a:latin typeface="Segoe UI" panose="020B0502040204020203" pitchFamily="34" charset="0"/>
+                <a:ea typeface="Segoe UI" panose="020B0502040204020203" pitchFamily="34" charset="-122"/>
+                <a:cs typeface="Segoe UI" panose="020B0502040204020203" pitchFamily="34" charset="-120"/>
               </a:rPr>
               <a:t>Pas de bénévolat — un flux monétaire construit dès la version présentée au concours</a:t>
             </a:r>
@@ -4051,23 +3876,22 @@
             <a:avLst/>
           </a:prstGeom>
           <a:noFill/>
-          <a:ln/>
         </p:spPr>
         <p:txBody>
           <a:bodyPr wrap="square" rtlCol="0" anchor="ctr"/>
           <a:lstStyle/>
           <a:p>
-            <a:pPr algn="r" indent="0" marL="0">
-              <a:buNone/>
-            </a:pPr>
-            <a:r>
-              <a:rPr lang="en-US" sz="1100" b="1" spc="100" kern="0" dirty="0">
+            <a:pPr marL="0" indent="0" algn="r">
+              <a:buNone/>
+            </a:pPr>
+            <a:r>
+              <a:rPr lang="en-US" sz="1100" b="1" kern="0" spc="100" dirty="0">
                 <a:solidFill>
                   <a:srgbClr val="A3ABBD"/>
                 </a:solidFill>
-                <a:latin typeface="Bahnschrift" pitchFamily="34" charset="0"/>
-                <a:ea typeface="Bahnschrift" pitchFamily="34" charset="-122"/>
-                <a:cs typeface="Bahnschrift" pitchFamily="34" charset="-120"/>
+                <a:latin typeface="Bahnschrift" panose="020B0502040204020203" pitchFamily="34" charset="0"/>
+                <a:ea typeface="Bahnschrift" panose="020B0502040204020203" pitchFamily="34" charset="-122"/>
+                <a:cs typeface="Bahnschrift" panose="020B0502040204020203" pitchFamily="34" charset="-120"/>
               </a:rPr>
               <a:t>CESTOMCLASH228</a:t>
             </a:r>
@@ -4100,7 +3924,7 @@
             <a:prstDash val="solid"/>
           </a:ln>
           <a:effectLst>
-            <a:outerShdw sx="100000" sy="100000" kx="0" ky="0" algn="bl" rotWithShape="0" blurRad="101600" dist="50800" dir="16200000">
+            <a:outerShdw blurRad="101600" dist="50800" dir="16200000" algn="bl" rotWithShape="0">
               <a:srgbClr val="FFC94D">
                 <a:alpha val="28000"/>
               </a:srgbClr>
@@ -4127,7 +3951,6 @@
               <a:alpha val="65000"/>
             </a:srgbClr>
           </a:solidFill>
-          <a:ln/>
         </p:spPr>
       </p:sp>
       <p:sp>
@@ -4147,9 +3970,8 @@
           <a:solidFill>
             <a:srgbClr val="FFC94D"/>
           </a:solidFill>
-          <a:ln/>
           <a:effectLst>
-            <a:outerShdw sx="100000" sy="100000" kx="0" ky="0" algn="bl" rotWithShape="0" blurRad="76200" dist="50800" dir="16200000">
+            <a:outerShdw blurRad="76200" dist="50800" dir="16200000" algn="bl" rotWithShape="0">
               <a:srgbClr val="FFC94D">
                 <a:alpha val="50000"/>
               </a:srgbClr>
@@ -4172,13 +3994,12 @@
             <a:avLst/>
           </a:prstGeom>
           <a:noFill/>
-          <a:ln/>
         </p:spPr>
         <p:txBody>
           <a:bodyPr wrap="square" rtlCol="0" anchor="ctr"/>
           <a:lstStyle/>
           <a:p>
-            <a:pPr algn="ctr" indent="0" marL="0">
+            <a:pPr marL="0" indent="0" algn="ctr">
               <a:buNone/>
             </a:pPr>
             <a:r>
@@ -4186,9 +4007,9 @@
                 <a:solidFill>
                   <a:srgbClr val="14161C"/>
                 </a:solidFill>
-                <a:latin typeface="Bahnschrift" pitchFamily="34" charset="0"/>
-                <a:ea typeface="Bahnschrift" pitchFamily="34" charset="-122"/>
-                <a:cs typeface="Bahnschrift" pitchFamily="34" charset="-120"/>
+                <a:latin typeface="Bahnschrift" panose="020B0502040204020203" pitchFamily="34" charset="0"/>
+                <a:ea typeface="Bahnschrift" panose="020B0502040204020203" pitchFamily="34" charset="-122"/>
+                <a:cs typeface="Bahnschrift" panose="020B0502040204020203" pitchFamily="34" charset="-120"/>
               </a:rPr>
               <a:t>1</a:t>
             </a:r>
@@ -4211,13 +4032,12 @@
             <a:avLst/>
           </a:prstGeom>
           <a:noFill/>
-          <a:ln/>
         </p:spPr>
         <p:txBody>
           <a:bodyPr wrap="square" rtlCol="0" anchor="ctr"/>
           <a:lstStyle/>
           <a:p>
-            <a:pPr indent="0" marL="0">
+            <a:pPr marL="0" indent="0">
               <a:buNone/>
             </a:pPr>
             <a:r>
@@ -4225,9 +4045,9 @@
                 <a:solidFill>
                   <a:srgbClr val="FFC94D"/>
                 </a:solidFill>
-                <a:latin typeface="Segoe UI" pitchFamily="34" charset="0"/>
-                <a:ea typeface="Segoe UI" pitchFamily="34" charset="-122"/>
-                <a:cs typeface="Segoe UI" pitchFamily="34" charset="-120"/>
+                <a:latin typeface="Segoe UI" panose="020B0502040204020203" pitchFamily="34" charset="0"/>
+                <a:ea typeface="Segoe UI" panose="020B0502040204020203" pitchFamily="34" charset="-122"/>
+                <a:cs typeface="Segoe UI" panose="020B0502040204020203" pitchFamily="34" charset="-120"/>
               </a:rPr>
               <a:t>Phase 1 — Maintenant</a:t>
             </a:r>
@@ -4250,13 +4070,12 @@
             <a:avLst/>
           </a:prstGeom>
           <a:noFill/>
-          <a:ln/>
         </p:spPr>
         <p:txBody>
           <a:bodyPr wrap="square" rtlCol="0" anchor="t"/>
           <a:lstStyle/>
           <a:p>
-            <a:pPr indent="0" marL="0">
+            <a:pPr marL="0" indent="0">
               <a:buNone/>
             </a:pPr>
             <a:r>
@@ -4264,9 +4083,9 @@
                 <a:solidFill>
                   <a:srgbClr val="F5F3EE"/>
                 </a:solidFill>
-                <a:latin typeface="Bahnschrift" pitchFamily="34" charset="0"/>
-                <a:ea typeface="Bahnschrift" pitchFamily="34" charset="-122"/>
-                <a:cs typeface="Bahnschrift" pitchFamily="34" charset="-120"/>
+                <a:latin typeface="Bahnschrift" panose="020B0502040204020203" pitchFamily="34" charset="0"/>
+                <a:ea typeface="Bahnschrift" panose="020B0502040204020203" pitchFamily="34" charset="-122"/>
+                <a:cs typeface="Bahnschrift" panose="020B0502040204020203" pitchFamily="34" charset="-120"/>
               </a:rPr>
               <a:t>Sponsoring vérifié</a:t>
             </a:r>
@@ -4282,37 +4101,43 @@
         </p:nvSpPr>
         <p:spPr>
           <a:xfrm>
-            <a:off x="841248" y="2971800"/>
-            <a:ext cx="3051962" cy="1600200"/>
-          </a:xfrm>
-          <a:prstGeom prst="rect">
-            <a:avLst/>
-          </a:prstGeom>
-          <a:noFill/>
-          <a:ln/>
+            <a:off x="841375" y="2710180"/>
+            <a:ext cx="3075940" cy="1002030"/>
+          </a:xfrm>
+          <a:prstGeom prst="rect">
+            <a:avLst/>
+          </a:prstGeom>
+          <a:noFill/>
         </p:spPr>
         <p:txBody>
           <a:bodyPr wrap="square" rtlCol="0" anchor="t"/>
           <a:lstStyle/>
           <a:p>
-            <a:pPr indent="0" marL="0">
+            <a:pPr marL="0" indent="0">
               <a:lnSpc>
                 <a:spcPct val="120000"/>
               </a:lnSpc>
               <a:buNone/>
             </a:pPr>
             <a:r>
-              <a:rPr lang="en-US" sz="1000" dirty="0">
+              <a:rPr lang="en-US" sz="900" dirty="0">
                 <a:solidFill>
                   <a:srgbClr val="A3ABBD"/>
                 </a:solidFill>
-                <a:latin typeface="Segoe UI" pitchFamily="34" charset="0"/>
-                <a:ea typeface="Segoe UI" pitchFamily="34" charset="-122"/>
-                <a:cs typeface="Segoe UI" pitchFamily="34" charset="-120"/>
+                <a:latin typeface="Segoe UI" panose="020B0502040204020203" pitchFamily="34" charset="0"/>
+                <a:ea typeface="Segoe UI" panose="020B0502040204020203" pitchFamily="34" charset="-122"/>
+                <a:cs typeface="Segoe UI" panose="020B0502040204020203" pitchFamily="34" charset="-120"/>
               </a:rPr>
               <a:t>Un acteur qui veut un privilège (Pin mis en avant) fait un virement réel vers un compte CESTOM dédié, soumet une preuve dans l'app, un vérificateur valide. 0 % prélevé par une passerelle de paiement tierce — tout reste dans le circuit CESTOM.</a:t>
             </a:r>
-            <a:endParaRPr lang="en-US" sz="1000" dirty="0"/>
+            <a:endParaRPr lang="en-US" sz="900" dirty="0">
+              <a:solidFill>
+                <a:srgbClr val="A3ABBD"/>
+              </a:solidFill>
+              <a:latin typeface="Segoe UI" panose="020B0502040204020203" pitchFamily="34" charset="0"/>
+              <a:ea typeface="Segoe UI" panose="020B0502040204020203" pitchFamily="34" charset="-122"/>
+              <a:cs typeface="Segoe UI" panose="020B0502040204020203" pitchFamily="34" charset="-120"/>
+            </a:endParaRPr>
           </a:p>
         </p:txBody>
       </p:sp>
@@ -4341,7 +4166,7 @@
             <a:prstDash val="solid"/>
           </a:ln>
           <a:effectLst>
-            <a:outerShdw sx="100000" sy="100000" kx="0" ky="0" algn="bl" rotWithShape="0" blurRad="101600" dist="50800" dir="16200000">
+            <a:outerShdw blurRad="101600" dist="50800" dir="16200000" algn="bl" rotWithShape="0">
               <a:srgbClr val="3FE0FF">
                 <a:alpha val="28000"/>
               </a:srgbClr>
@@ -4368,7 +4193,6 @@
               <a:alpha val="65000"/>
             </a:srgbClr>
           </a:solidFill>
-          <a:ln/>
         </p:spPr>
       </p:sp>
       <p:sp>
@@ -4388,9 +4212,8 @@
           <a:solidFill>
             <a:srgbClr val="3FE0FF"/>
           </a:solidFill>
-          <a:ln/>
           <a:effectLst>
-            <a:outerShdw sx="100000" sy="100000" kx="0" ky="0" algn="bl" rotWithShape="0" blurRad="76200" dist="50800" dir="16200000">
+            <a:outerShdw blurRad="76200" dist="50800" dir="16200000" algn="bl" rotWithShape="0">
               <a:srgbClr val="3FE0FF">
                 <a:alpha val="50000"/>
               </a:srgbClr>
@@ -4413,13 +4236,12 @@
             <a:avLst/>
           </a:prstGeom>
           <a:noFill/>
-          <a:ln/>
         </p:spPr>
         <p:txBody>
           <a:bodyPr wrap="square" rtlCol="0" anchor="ctr"/>
           <a:lstStyle/>
           <a:p>
-            <a:pPr algn="ctr" indent="0" marL="0">
+            <a:pPr marL="0" indent="0" algn="ctr">
               <a:buNone/>
             </a:pPr>
             <a:r>
@@ -4427,9 +4249,9 @@
                 <a:solidFill>
                   <a:srgbClr val="14161C"/>
                 </a:solidFill>
-                <a:latin typeface="Bahnschrift" pitchFamily="34" charset="0"/>
-                <a:ea typeface="Bahnschrift" pitchFamily="34" charset="-122"/>
-                <a:cs typeface="Bahnschrift" pitchFamily="34" charset="-120"/>
+                <a:latin typeface="Bahnschrift" panose="020B0502040204020203" pitchFamily="34" charset="0"/>
+                <a:ea typeface="Bahnschrift" panose="020B0502040204020203" pitchFamily="34" charset="-122"/>
+                <a:cs typeface="Bahnschrift" panose="020B0502040204020203" pitchFamily="34" charset="-120"/>
               </a:rPr>
               <a:t>2</a:t>
             </a:r>
@@ -4452,13 +4274,12 @@
             <a:avLst/>
           </a:prstGeom>
           <a:noFill/>
-          <a:ln/>
         </p:spPr>
         <p:txBody>
           <a:bodyPr wrap="square" rtlCol="0" anchor="ctr"/>
           <a:lstStyle/>
           <a:p>
-            <a:pPr indent="0" marL="0">
+            <a:pPr marL="0" indent="0">
               <a:buNone/>
             </a:pPr>
             <a:r>
@@ -4466,9 +4287,9 @@
                 <a:solidFill>
                   <a:srgbClr val="3FE0FF"/>
                 </a:solidFill>
-                <a:latin typeface="Segoe UI" pitchFamily="34" charset="0"/>
-                <a:ea typeface="Segoe UI" pitchFamily="34" charset="-122"/>
-                <a:cs typeface="Segoe UI" pitchFamily="34" charset="-120"/>
+                <a:latin typeface="Segoe UI" panose="020B0502040204020203" pitchFamily="34" charset="0"/>
+                <a:ea typeface="Segoe UI" panose="020B0502040204020203" pitchFamily="34" charset="-122"/>
+                <a:cs typeface="Segoe UI" panose="020B0502040204020203" pitchFamily="34" charset="-120"/>
               </a:rPr>
               <a:t>Phase 2 — Après traction</a:t>
             </a:r>
@@ -4491,13 +4312,12 @@
             <a:avLst/>
           </a:prstGeom>
           <a:noFill/>
-          <a:ln/>
         </p:spPr>
         <p:txBody>
           <a:bodyPr wrap="square" rtlCol="0" anchor="t"/>
           <a:lstStyle/>
           <a:p>
-            <a:pPr indent="0" marL="0">
+            <a:pPr marL="0" indent="0">
               <a:buNone/>
             </a:pPr>
             <a:r>
@@ -4505,9 +4325,9 @@
                 <a:solidFill>
                   <a:srgbClr val="F5F3EE"/>
                 </a:solidFill>
-                <a:latin typeface="Bahnschrift" pitchFamily="34" charset="0"/>
-                <a:ea typeface="Bahnschrift" pitchFamily="34" charset="-122"/>
-                <a:cs typeface="Bahnschrift" pitchFamily="34" charset="-120"/>
+                <a:latin typeface="Bahnschrift" panose="020B0502040204020203" pitchFamily="34" charset="0"/>
+                <a:ea typeface="Bahnschrift" panose="020B0502040204020203" pitchFamily="34" charset="-122"/>
+                <a:cs typeface="Bahnschrift" panose="020B0502040204020203" pitchFamily="34" charset="-120"/>
               </a:rPr>
               <a:t>Commission sur services rendus</a:t>
             </a:r>
@@ -4523,20 +4343,19 @@
         </p:nvSpPr>
         <p:spPr>
           <a:xfrm>
-            <a:off x="4569866" y="2971800"/>
+            <a:off x="4569866" y="2710180"/>
             <a:ext cx="3051962" cy="1600200"/>
           </a:xfrm>
           <a:prstGeom prst="rect">
             <a:avLst/>
           </a:prstGeom>
           <a:noFill/>
-          <a:ln/>
         </p:spPr>
         <p:txBody>
           <a:bodyPr wrap="square" rtlCol="0" anchor="t"/>
           <a:lstStyle/>
           <a:p>
-            <a:pPr indent="0" marL="0">
+            <a:pPr marL="0" indent="0">
               <a:lnSpc>
                 <a:spcPct val="120000"/>
               </a:lnSpc>
@@ -4547,9 +4366,9 @@
                 <a:solidFill>
                   <a:srgbClr val="A3ABBD"/>
                 </a:solidFill>
-                <a:latin typeface="Segoe UI" pitchFamily="34" charset="0"/>
-                <a:ea typeface="Segoe UI" pitchFamily="34" charset="-122"/>
-                <a:cs typeface="Segoe UI" pitchFamily="34" charset="-120"/>
+                <a:latin typeface="Segoe UI" panose="020B0502040204020203" pitchFamily="34" charset="0"/>
+                <a:ea typeface="Segoe UI" panose="020B0502040204020203" pitchFamily="34" charset="-122"/>
+                <a:cs typeface="Segoe UI" panose="020B0502040204020203" pitchFamily="34" charset="-120"/>
               </a:rPr>
               <a:t>Une fois la confiance et l'usage établis via la Phase 1, commission sur les mises en relation payantes entre étudiants.</a:t>
             </a:r>
@@ -4582,7 +4401,7 @@
             <a:prstDash val="solid"/>
           </a:ln>
           <a:effectLst>
-            <a:outerShdw sx="100000" sy="100000" kx="0" ky="0" algn="bl" rotWithShape="0" blurRad="101600" dist="50800" dir="16200000">
+            <a:outerShdw blurRad="101600" dist="50800" dir="16200000" algn="bl" rotWithShape="0">
               <a:srgbClr val="2FE894">
                 <a:alpha val="28000"/>
               </a:srgbClr>
@@ -4609,7 +4428,6 @@
               <a:alpha val="65000"/>
             </a:srgbClr>
           </a:solidFill>
-          <a:ln/>
         </p:spPr>
       </p:sp>
       <p:sp>
@@ -4629,9 +4447,8 @@
           <a:solidFill>
             <a:srgbClr val="2FE894"/>
           </a:solidFill>
-          <a:ln/>
           <a:effectLst>
-            <a:outerShdw sx="100000" sy="100000" kx="0" ky="0" algn="bl" rotWithShape="0" blurRad="76200" dist="50800" dir="16200000">
+            <a:outerShdw blurRad="76200" dist="50800" dir="16200000" algn="bl" rotWithShape="0">
               <a:srgbClr val="2FE894">
                 <a:alpha val="50000"/>
               </a:srgbClr>
@@ -4654,13 +4471,12 @@
             <a:avLst/>
           </a:prstGeom>
           <a:noFill/>
-          <a:ln/>
         </p:spPr>
         <p:txBody>
           <a:bodyPr wrap="square" rtlCol="0" anchor="ctr"/>
           <a:lstStyle/>
           <a:p>
-            <a:pPr algn="ctr" indent="0" marL="0">
+            <a:pPr marL="0" indent="0" algn="ctr">
               <a:buNone/>
             </a:pPr>
             <a:r>
@@ -4668,9 +4484,9 @@
                 <a:solidFill>
                   <a:srgbClr val="14161C"/>
                 </a:solidFill>
-                <a:latin typeface="Bahnschrift" pitchFamily="34" charset="0"/>
-                <a:ea typeface="Bahnschrift" pitchFamily="34" charset="-122"/>
-                <a:cs typeface="Bahnschrift" pitchFamily="34" charset="-120"/>
+                <a:latin typeface="Bahnschrift" panose="020B0502040204020203" pitchFamily="34" charset="0"/>
+                <a:ea typeface="Bahnschrift" panose="020B0502040204020203" pitchFamily="34" charset="-122"/>
+                <a:cs typeface="Bahnschrift" panose="020B0502040204020203" pitchFamily="34" charset="-120"/>
               </a:rPr>
               <a:t>3</a:t>
             </a:r>
@@ -4693,13 +4509,12 @@
             <a:avLst/>
           </a:prstGeom>
           <a:noFill/>
-          <a:ln/>
         </p:spPr>
         <p:txBody>
           <a:bodyPr wrap="square" rtlCol="0" anchor="ctr"/>
           <a:lstStyle/>
           <a:p>
-            <a:pPr indent="0" marL="0">
+            <a:pPr marL="0" indent="0">
               <a:buNone/>
             </a:pPr>
             <a:r>
@@ -4707,9 +4522,9 @@
                 <a:solidFill>
                   <a:srgbClr val="2FE894"/>
                 </a:solidFill>
-                <a:latin typeface="Segoe UI" pitchFamily="34" charset="0"/>
-                <a:ea typeface="Segoe UI" pitchFamily="34" charset="-122"/>
-                <a:cs typeface="Segoe UI" pitchFamily="34" charset="-120"/>
+                <a:latin typeface="Segoe UI" panose="020B0502040204020203" pitchFamily="34" charset="0"/>
+                <a:ea typeface="Segoe UI" panose="020B0502040204020203" pitchFamily="34" charset="-122"/>
+                <a:cs typeface="Segoe UI" panose="020B0502040204020203" pitchFamily="34" charset="-120"/>
               </a:rPr>
               <a:t>Phase 3 — Vision</a:t>
             </a:r>
@@ -4732,13 +4547,12 @@
             <a:avLst/>
           </a:prstGeom>
           <a:noFill/>
-          <a:ln/>
         </p:spPr>
         <p:txBody>
           <a:bodyPr wrap="square" rtlCol="0" anchor="t"/>
           <a:lstStyle/>
           <a:p>
-            <a:pPr indent="0" marL="0">
+            <a:pPr marL="0" indent="0">
               <a:buNone/>
             </a:pPr>
             <a:r>
@@ -4746,9 +4560,9 @@
                 <a:solidFill>
                   <a:srgbClr val="F5F3EE"/>
                 </a:solidFill>
-                <a:latin typeface="Bahnschrift" pitchFamily="34" charset="0"/>
-                <a:ea typeface="Bahnschrift" pitchFamily="34" charset="-122"/>
-                <a:cs typeface="Bahnschrift" pitchFamily="34" charset="-120"/>
+                <a:latin typeface="Bahnschrift" panose="020B0502040204020203" pitchFamily="34" charset="0"/>
+                <a:ea typeface="Bahnschrift" panose="020B0502040204020203" pitchFamily="34" charset="-122"/>
+                <a:cs typeface="Bahnschrift" panose="020B0502040204020203" pitchFamily="34" charset="-120"/>
               </a:rPr>
               <a:t>Licence à d'autres diasporas</a:t>
             </a:r>
@@ -4764,20 +4578,19 @@
         </p:nvSpPr>
         <p:spPr>
           <a:xfrm>
-            <a:off x="8298485" y="2971800"/>
+            <a:off x="8272450" y="2710180"/>
             <a:ext cx="3051962" cy="1600200"/>
           </a:xfrm>
           <a:prstGeom prst="rect">
             <a:avLst/>
           </a:prstGeom>
           <a:noFill/>
-          <a:ln/>
         </p:spPr>
         <p:txBody>
           <a:bodyPr wrap="square" rtlCol="0" anchor="t"/>
           <a:lstStyle/>
           <a:p>
-            <a:pPr indent="0" marL="0">
+            <a:pPr marL="0" indent="0">
               <a:lnSpc>
                 <a:spcPct val="120000"/>
               </a:lnSpc>
@@ -4788,9 +4601,9 @@
                 <a:solidFill>
                   <a:srgbClr val="A3ABBD"/>
                 </a:solidFill>
-                <a:latin typeface="Segoe UI" pitchFamily="34" charset="0"/>
-                <a:ea typeface="Segoe UI" pitchFamily="34" charset="-122"/>
-                <a:cs typeface="Segoe UI" pitchFamily="34" charset="-120"/>
+                <a:latin typeface="Segoe UI" panose="020B0502040204020203" pitchFamily="34" charset="0"/>
+                <a:ea typeface="Segoe UI" panose="020B0502040204020203" pitchFamily="34" charset="-122"/>
+                <a:cs typeface="Segoe UI" panose="020B0502040204020203" pitchFamily="34" charset="-120"/>
               </a:rPr>
               <a:t>Architecture (carte, réputation, sponsoring vérifié, modération spatiale) transposable à toute communauté étudiante structurée autour d'une association reconnue.</a:t>
             </a:r>
@@ -4827,348 +4640,6 @@
       </p:sp>
       <p:sp>
         <p:nvSpPr>
-          <p:cNvPr id="29" name="Shape 27"/>
-          <p:cNvSpPr/>
-          <p:nvPr/>
-        </p:nvSpPr>
-        <p:spPr>
-          <a:xfrm>
-            <a:off x="1563587" y="4758171"/>
-            <a:ext cx="362390" cy="16070"/>
-          </a:xfrm>
-          <a:prstGeom prst="line">
-            <a:avLst/>
-          </a:prstGeom>
-          <a:noFill/>
-          <a:ln w="9525">
-            <a:solidFill>
-              <a:srgbClr val="3FE0FF">
-                <a:alpha val="45000"/>
-              </a:srgbClr>
-            </a:solidFill>
-            <a:prstDash val="solid"/>
-          </a:ln>
-        </p:spPr>
-      </p:sp>
-      <p:sp>
-        <p:nvSpPr>
-          <p:cNvPr id="30" name="Shape 28"/>
-          <p:cNvSpPr/>
-          <p:nvPr/>
-        </p:nvSpPr>
-        <p:spPr>
-          <a:xfrm>
-            <a:off x="1287355" y="4774241"/>
-            <a:ext cx="638622" cy="86061"/>
-          </a:xfrm>
-          <a:prstGeom prst="line">
-            <a:avLst/>
-          </a:prstGeom>
-          <a:noFill/>
-          <a:ln w="9525">
-            <a:solidFill>
-              <a:srgbClr val="3FE0FF">
-                <a:alpha val="45000"/>
-              </a:srgbClr>
-            </a:solidFill>
-            <a:prstDash val="solid"/>
-          </a:ln>
-        </p:spPr>
-      </p:sp>
-      <p:sp>
-        <p:nvSpPr>
-          <p:cNvPr id="31" name="Shape 29"/>
-          <p:cNvSpPr/>
-          <p:nvPr/>
-        </p:nvSpPr>
-        <p:spPr>
-          <a:xfrm>
-            <a:off x="1143000" y="4774241"/>
-            <a:ext cx="782977" cy="529279"/>
-          </a:xfrm>
-          <a:prstGeom prst="line">
-            <a:avLst/>
-          </a:prstGeom>
-          <a:noFill/>
-          <a:ln w="9525">
-            <a:solidFill>
-              <a:srgbClr val="3FE0FF">
-                <a:alpha val="45000"/>
-              </a:srgbClr>
-            </a:solidFill>
-            <a:prstDash val="solid"/>
-          </a:ln>
-        </p:spPr>
-      </p:sp>
-      <p:sp>
-        <p:nvSpPr>
-          <p:cNvPr id="32" name="Shape 30"/>
-          <p:cNvSpPr/>
-          <p:nvPr/>
-        </p:nvSpPr>
-        <p:spPr>
-          <a:xfrm>
-            <a:off x="1925977" y="4755411"/>
-            <a:ext cx="317173" cy="18830"/>
-          </a:xfrm>
-          <a:prstGeom prst="line">
-            <a:avLst/>
-          </a:prstGeom>
-          <a:noFill/>
-          <a:ln w="9525">
-            <a:solidFill>
-              <a:srgbClr val="3FE0FF">
-                <a:alpha val="45000"/>
-              </a:srgbClr>
-            </a:solidFill>
-            <a:prstDash val="solid"/>
-          </a:ln>
-        </p:spPr>
-      </p:sp>
-      <p:sp>
-        <p:nvSpPr>
-          <p:cNvPr id="33" name="Shape 31"/>
-          <p:cNvSpPr/>
-          <p:nvPr/>
-        </p:nvSpPr>
-        <p:spPr>
-          <a:xfrm>
-            <a:off x="1925977" y="4361688"/>
-            <a:ext cx="9513" cy="412553"/>
-          </a:xfrm>
-          <a:prstGeom prst="line">
-            <a:avLst/>
-          </a:prstGeom>
-          <a:noFill/>
-          <a:ln w="9525">
-            <a:solidFill>
-              <a:srgbClr val="3FE0FF">
-                <a:alpha val="45000"/>
-              </a:srgbClr>
-            </a:solidFill>
-            <a:prstDash val="solid"/>
-          </a:ln>
-        </p:spPr>
-      </p:sp>
-      <p:sp>
-        <p:nvSpPr>
-          <p:cNvPr id="34" name="Shape 32"/>
-          <p:cNvSpPr/>
-          <p:nvPr/>
-        </p:nvSpPr>
-        <p:spPr>
-          <a:xfrm>
-            <a:off x="1925977" y="4606355"/>
-            <a:ext cx="1457303" cy="167886"/>
-          </a:xfrm>
-          <a:prstGeom prst="line">
-            <a:avLst/>
-          </a:prstGeom>
-          <a:noFill/>
-          <a:ln w="9525">
-            <a:solidFill>
-              <a:srgbClr val="3FE0FF">
-                <a:alpha val="45000"/>
-              </a:srgbClr>
-            </a:solidFill>
-            <a:prstDash val="solid"/>
-          </a:ln>
-        </p:spPr>
-      </p:sp>
-      <p:sp>
-        <p:nvSpPr>
-          <p:cNvPr id="35" name="Shape 33"/>
-          <p:cNvSpPr/>
-          <p:nvPr/>
-        </p:nvSpPr>
-        <p:spPr>
-          <a:xfrm>
-            <a:off x="1453859" y="4648443"/>
-            <a:ext cx="219456" cy="219456"/>
-          </a:xfrm>
-          <a:prstGeom prst="ellipse">
-            <a:avLst/>
-          </a:prstGeom>
-          <a:solidFill>
-            <a:srgbClr val="FFC94D"/>
-          </a:solidFill>
-          <a:ln w="9525">
-            <a:solidFill>
-              <a:srgbClr val="14161C"/>
-            </a:solidFill>
-            <a:prstDash val="solid"/>
-          </a:ln>
-          <a:effectLst>
-            <a:outerShdw sx="100000" sy="100000" kx="0" ky="0" algn="bl" rotWithShape="0" blurRad="63500" dist="50800" dir="16200000">
-              <a:srgbClr val="FFC94D">
-                <a:alpha val="40000"/>
-              </a:srgbClr>
-            </a:outerShdw>
-          </a:effectLst>
-        </p:spPr>
-      </p:sp>
-      <p:sp>
-        <p:nvSpPr>
-          <p:cNvPr id="36" name="Shape 34"/>
-          <p:cNvSpPr/>
-          <p:nvPr/>
-        </p:nvSpPr>
-        <p:spPr>
-          <a:xfrm>
-            <a:off x="1187315" y="4760262"/>
-            <a:ext cx="200080" cy="200080"/>
-          </a:xfrm>
-          <a:prstGeom prst="ellipse">
-            <a:avLst/>
-          </a:prstGeom>
-          <a:solidFill>
-            <a:srgbClr val="FFC94D"/>
-          </a:solidFill>
-          <a:ln w="9525">
-            <a:solidFill>
-              <a:srgbClr val="14161C"/>
-            </a:solidFill>
-            <a:prstDash val="solid"/>
-          </a:ln>
-          <a:effectLst>
-            <a:outerShdw sx="100000" sy="100000" kx="0" ky="0" algn="bl" rotWithShape="0" blurRad="63500" dist="50800" dir="16200000">
-              <a:srgbClr val="FFC94D">
-                <a:alpha val="40000"/>
-              </a:srgbClr>
-            </a:outerShdw>
-          </a:effectLst>
-        </p:spPr>
-      </p:sp>
-      <p:sp>
-        <p:nvSpPr>
-          <p:cNvPr id="37" name="Shape 35"/>
-          <p:cNvSpPr/>
-          <p:nvPr/>
-        </p:nvSpPr>
-        <p:spPr>
-          <a:xfrm>
-            <a:off x="1068068" y="5228588"/>
-            <a:ext cx="149865" cy="149865"/>
-          </a:xfrm>
-          <a:prstGeom prst="ellipse">
-            <a:avLst/>
-          </a:prstGeom>
-          <a:solidFill>
-            <a:srgbClr val="FFC94D"/>
-          </a:solidFill>
-          <a:ln w="9525">
-            <a:solidFill>
-              <a:srgbClr val="14161C"/>
-            </a:solidFill>
-            <a:prstDash val="solid"/>
-          </a:ln>
-          <a:effectLst>
-            <a:outerShdw sx="100000" sy="100000" kx="0" ky="0" algn="bl" rotWithShape="0" blurRad="63500" dist="50800" dir="16200000">
-              <a:srgbClr val="FFC94D">
-                <a:alpha val="40000"/>
-              </a:srgbClr>
-            </a:outerShdw>
-          </a:effectLst>
-        </p:spPr>
-      </p:sp>
-      <p:sp>
-        <p:nvSpPr>
-          <p:cNvPr id="38" name="Shape 36"/>
-          <p:cNvSpPr/>
-          <p:nvPr/>
-        </p:nvSpPr>
-        <p:spPr>
-          <a:xfrm>
-            <a:off x="2171826" y="4684086"/>
-            <a:ext cx="142650" cy="142650"/>
-          </a:xfrm>
-          <a:prstGeom prst="ellipse">
-            <a:avLst/>
-          </a:prstGeom>
-          <a:solidFill>
-            <a:srgbClr val="FFC94D"/>
-          </a:solidFill>
-          <a:ln w="9525">
-            <a:solidFill>
-              <a:srgbClr val="14161C"/>
-            </a:solidFill>
-            <a:prstDash val="solid"/>
-          </a:ln>
-          <a:effectLst>
-            <a:outerShdw sx="100000" sy="100000" kx="0" ky="0" algn="bl" rotWithShape="0" blurRad="63500" dist="50800" dir="16200000">
-              <a:srgbClr val="FFC94D">
-                <a:alpha val="40000"/>
-              </a:srgbClr>
-            </a:outerShdw>
-          </a:effectLst>
-        </p:spPr>
-      </p:sp>
-      <p:sp>
-        <p:nvSpPr>
-          <p:cNvPr id="39" name="Shape 37"/>
-          <p:cNvSpPr/>
-          <p:nvPr/>
-        </p:nvSpPr>
-        <p:spPr>
-          <a:xfrm>
-            <a:off x="1883973" y="4310171"/>
-            <a:ext cx="103035" cy="103035"/>
-          </a:xfrm>
-          <a:prstGeom prst="ellipse">
-            <a:avLst/>
-          </a:prstGeom>
-          <a:solidFill>
-            <a:srgbClr val="FFC94D"/>
-          </a:solidFill>
-          <a:ln w="9525">
-            <a:solidFill>
-              <a:srgbClr val="14161C"/>
-            </a:solidFill>
-            <a:prstDash val="solid"/>
-          </a:ln>
-          <a:effectLst>
-            <a:outerShdw sx="100000" sy="100000" kx="0" ky="0" algn="bl" rotWithShape="0" blurRad="63500" dist="50800" dir="16200000">
-              <a:srgbClr val="FFC94D">
-                <a:alpha val="40000"/>
-              </a:srgbClr>
-            </a:outerShdw>
-          </a:effectLst>
-        </p:spPr>
-      </p:sp>
-      <p:sp>
-        <p:nvSpPr>
-          <p:cNvPr id="40" name="Shape 38"/>
-          <p:cNvSpPr/>
-          <p:nvPr/>
-        </p:nvSpPr>
-        <p:spPr>
-          <a:xfrm>
-            <a:off x="3337560" y="4560635"/>
-            <a:ext cx="91440" cy="91440"/>
-          </a:xfrm>
-          <a:prstGeom prst="ellipse">
-            <a:avLst/>
-          </a:prstGeom>
-          <a:solidFill>
-            <a:srgbClr val="FFC94D"/>
-          </a:solidFill>
-          <a:ln w="9525">
-            <a:solidFill>
-              <a:srgbClr val="14161C"/>
-            </a:solidFill>
-            <a:prstDash val="solid"/>
-          </a:ln>
-          <a:effectLst>
-            <a:outerShdw sx="100000" sy="100000" kx="0" ky="0" algn="bl" rotWithShape="0" blurRad="63500" dist="50800" dir="16200000">
-              <a:srgbClr val="FFC94D">
-                <a:alpha val="40000"/>
-              </a:srgbClr>
-            </a:outerShdw>
-          </a:effectLst>
-        </p:spPr>
-      </p:sp>
-      <p:sp>
-        <p:nvSpPr>
           <p:cNvPr id="41" name="Text 39"/>
           <p:cNvSpPr/>
           <p:nvPr/>
@@ -5182,13 +4653,12 @@
             <a:avLst/>
           </a:prstGeom>
           <a:noFill/>
-          <a:ln/>
         </p:spPr>
         <p:txBody>
           <a:bodyPr wrap="square" rtlCol="0" anchor="ctr"/>
           <a:lstStyle/>
           <a:p>
-            <a:pPr algn="ctr" indent="0" marL="0">
+            <a:pPr marL="0" indent="0" algn="ctr">
               <a:buNone/>
             </a:pPr>
             <a:r>
@@ -5196,9 +4666,9 @@
                 <a:solidFill>
                   <a:srgbClr val="A3ABBD"/>
                 </a:solidFill>
-                <a:latin typeface="Segoe UI" pitchFamily="34" charset="0"/>
-                <a:ea typeface="Segoe UI" pitchFamily="34" charset="-122"/>
-                <a:cs typeface="Segoe UI" pitchFamily="34" charset="-120"/>
+                <a:latin typeface="Segoe UI" panose="020B0502040204020203" pitchFamily="34" charset="0"/>
+                <a:ea typeface="Segoe UI" panose="020B0502040204020203" pitchFamily="34" charset="-122"/>
+                <a:cs typeface="Segoe UI" panose="020B0502040204020203" pitchFamily="34" charset="-120"/>
               </a:rPr>
               <a:t>Rabat 220  ·  Casablanca 180  ·  Marrakech 95  ·  Fès 85  ·  Tanger 40  ·  Oujda 30</a:t>
             </a:r>
@@ -5221,13 +4691,12 @@
             <a:avLst/>
           </a:prstGeom>
           <a:noFill/>
-          <a:ln/>
         </p:spPr>
         <p:txBody>
           <a:bodyPr wrap="square" rtlCol="0" anchor="ctr"/>
           <a:lstStyle/>
           <a:p>
-            <a:pPr indent="0" marL="0">
+            <a:pPr marL="0" indent="0">
               <a:lnSpc>
                 <a:spcPct val="115000"/>
               </a:lnSpc>
@@ -5238,16 +4707,16 @@
                 <a:solidFill>
                   <a:srgbClr val="FFC94D"/>
                 </a:solidFill>
-                <a:latin typeface="Bahnschrift" pitchFamily="34" charset="0"/>
-                <a:ea typeface="Bahnschrift" pitchFamily="34" charset="-122"/>
-                <a:cs typeface="Bahnschrift" pitchFamily="34" charset="-120"/>
+                <a:latin typeface="Bahnschrift" panose="020B0502040204020203" pitchFamily="34" charset="0"/>
+                <a:ea typeface="Bahnschrift" panose="020B0502040204020203" pitchFamily="34" charset="-122"/>
+                <a:cs typeface="Bahnschrift" panose="020B0502040204020203" pitchFamily="34" charset="-120"/>
               </a:rPr>
               <a:t>650</a:t>
             </a:r>
             <a:endParaRPr lang="en-US" sz="2800" dirty="0"/>
           </a:p>
           <a:p>
-            <a:pPr indent="0" marL="0">
+            <a:pPr marL="0" indent="0">
               <a:lnSpc>
                 <a:spcPct val="115000"/>
               </a:lnSpc>
@@ -5258,33 +4727,69 @@
                 <a:solidFill>
                   <a:srgbClr val="F5F3EE"/>
                 </a:solidFill>
-                <a:latin typeface="Bahnschrift" pitchFamily="34" charset="0"/>
-                <a:ea typeface="Bahnschrift" pitchFamily="34" charset="-122"/>
-                <a:cs typeface="Bahnschrift" pitchFamily="34" charset="-120"/>
+                <a:latin typeface="Bahnschrift" panose="020B0502040204020203" pitchFamily="34" charset="0"/>
+                <a:ea typeface="Bahnschrift" panose="020B0502040204020203" pitchFamily="34" charset="-122"/>
+                <a:cs typeface="Bahnschrift" panose="020B0502040204020203" pitchFamily="34" charset="-120"/>
               </a:rPr>
               <a:t>membres CESTOM, 6 villes</a:t>
             </a:r>
-            <a:endParaRPr lang="en-US" sz="2800" dirty="0"/>
-          </a:p>
-          <a:p>
-            <a:pPr indent="0" marL="0">
+            <a:r>
+              <a:rPr lang="fr-FR" altLang="en-US" sz="1100" dirty="0">
+                <a:solidFill>
+                  <a:srgbClr val="F5F3EE"/>
+                </a:solidFill>
+                <a:latin typeface="Bahnschrift" panose="020B0502040204020203" pitchFamily="34" charset="0"/>
+                <a:ea typeface="Bahnschrift" panose="020B0502040204020203" pitchFamily="34" charset="-122"/>
+                <a:cs typeface="Bahnschrift" panose="020B0502040204020203" pitchFamily="34" charset="-120"/>
+              </a:rPr>
+              <a:t> </a:t>
+            </a:r>
+            <a:endParaRPr lang="fr-FR" altLang="en-US" sz="1100" dirty="0">
+              <a:solidFill>
+                <a:srgbClr val="F5F3EE"/>
+              </a:solidFill>
+              <a:latin typeface="Bahnschrift" panose="020B0502040204020203" pitchFamily="34" charset="0"/>
+              <a:ea typeface="Bahnschrift" panose="020B0502040204020203" pitchFamily="34" charset="-122"/>
+              <a:cs typeface="Bahnschrift" panose="020B0502040204020203" pitchFamily="34" charset="-120"/>
+            </a:endParaRPr>
+          </a:p>
+          <a:p>
+            <a:pPr marL="0" indent="0">
               <a:lnSpc>
                 <a:spcPct val="115000"/>
               </a:lnSpc>
               <a:buNone/>
             </a:pPr>
             <a:r>
-              <a:rPr lang="en-US" sz="800" dirty="0">
+              <a:rPr lang="en-US" sz="2000" dirty="0">
                 <a:solidFill>
                   <a:srgbClr val="A3ABBD"/>
                 </a:solidFill>
-                <a:latin typeface="Bahnschrift" pitchFamily="34" charset="0"/>
-                <a:ea typeface="Bahnschrift" pitchFamily="34" charset="-122"/>
-                <a:cs typeface="Bahnschrift" pitchFamily="34" charset="-120"/>
-              </a:rPr>
-              <a:t>Source : cestom.org</a:t>
-            </a:r>
-            <a:endParaRPr lang="en-US" sz="2800" dirty="0"/>
+                <a:latin typeface="Bahnschrift" panose="020B0502040204020203" pitchFamily="34" charset="0"/>
+                <a:ea typeface="Bahnschrift" panose="020B0502040204020203" pitchFamily="34" charset="-122"/>
+                <a:cs typeface="Bahnschrift" panose="020B0502040204020203" pitchFamily="34" charset="-120"/>
+              </a:rPr>
+              <a:t>Source : </a:t>
+            </a:r>
+            <a:r>
+              <a:rPr lang="en-US" sz="2000" dirty="0">
+                <a:solidFill>
+                  <a:schemeClr val="accent1"/>
+                </a:solidFill>
+                <a:latin typeface="Bahnschrift" panose="020B0502040204020203" pitchFamily="34" charset="0"/>
+                <a:ea typeface="Bahnschrift" panose="020B0502040204020203" pitchFamily="34" charset="-122"/>
+                <a:cs typeface="Bahnschrift" panose="020B0502040204020203" pitchFamily="34" charset="-120"/>
+              </a:rPr>
+              <a:t>cestom.org</a:t>
+            </a:r>
+            <a:endParaRPr lang="en-US" sz="2000" dirty="0">
+              <a:solidFill>
+                <a:schemeClr val="accent1"/>
+              </a:solidFill>
+              <a:latin typeface="Bahnschrift" panose="020B0502040204020203" pitchFamily="34" charset="0"/>
+              <a:ea typeface="Bahnschrift" panose="020B0502040204020203" pitchFamily="34" charset="-122"/>
+              <a:cs typeface="Bahnschrift" panose="020B0502040204020203" pitchFamily="34" charset="-120"/>
+            </a:endParaRPr>
           </a:p>
         </p:txBody>
       </p:sp>
@@ -5303,37 +4808,33 @@
             <a:avLst/>
           </a:prstGeom>
           <a:noFill/>
-          <a:ln/>
         </p:spPr>
         <p:txBody>
           <a:bodyPr wrap="square" rtlCol="0" anchor="ctr"/>
           <a:lstStyle/>
           <a:p>
-            <a:pPr indent="0" marL="0">
-              <a:buNone/>
-            </a:pPr>
-            <a:r>
-              <a:rPr lang="en-US" sz="1000" b="1" spc="100" kern="0" dirty="0">
+            <a:pPr marL="0" indent="0">
+              <a:buNone/>
+            </a:pPr>
+            <a:r>
+              <a:rPr lang="en-US" sz="1000" b="1" kern="0" spc="100" dirty="0">
                 <a:solidFill>
                   <a:srgbClr val="A3ABBD"/>
                 </a:solidFill>
-                <a:latin typeface="Bahnschrift" pitchFamily="34" charset="0"/>
-                <a:ea typeface="Bahnschrift" pitchFamily="34" charset="-122"/>
-                <a:cs typeface="Bahnschrift" pitchFamily="34" charset="-120"/>
+                <a:latin typeface="Bahnschrift" panose="020B0502040204020203" pitchFamily="34" charset="0"/>
+                <a:ea typeface="Bahnschrift" panose="020B0502040204020203" pitchFamily="34" charset="-122"/>
+                <a:cs typeface="Bahnschrift" panose="020B0502040204020203" pitchFamily="34" charset="-120"/>
               </a:rPr>
               <a:t>CESTOMCLASH228  </a:t>
             </a:r>
-            <a:pPr indent="0" marL="0">
-              <a:buNone/>
-            </a:pPr>
-            <a:r>
-              <a:rPr lang="en-US" sz="1000" spc="100" kern="0" dirty="0">
+            <a:r>
+              <a:rPr lang="en-US" sz="1000" kern="0" spc="100" dirty="0">
                 <a:solidFill>
                   <a:srgbClr val="A3ABBD"/>
                 </a:solidFill>
-                <a:latin typeface="Bahnschrift" pitchFamily="34" charset="0"/>
-                <a:ea typeface="Bahnschrift" pitchFamily="34" charset="-122"/>
-                <a:cs typeface="Bahnschrift" pitchFamily="34" charset="-120"/>
+                <a:latin typeface="Bahnschrift" panose="020B0502040204020203" pitchFamily="34" charset="0"/>
+                <a:ea typeface="Bahnschrift" panose="020B0502040204020203" pitchFamily="34" charset="-122"/>
+                <a:cs typeface="Bahnschrift" panose="020B0502040204020203" pitchFamily="34" charset="-120"/>
               </a:rPr>
               <a:t>· Explore. Partage. Level-up.</a:t>
             </a:r>
@@ -5356,13 +4857,12 @@
             <a:avLst/>
           </a:prstGeom>
           <a:noFill/>
-          <a:ln/>
         </p:spPr>
         <p:txBody>
           <a:bodyPr wrap="square" rtlCol="0" anchor="ctr"/>
           <a:lstStyle/>
           <a:p>
-            <a:pPr algn="r" indent="0" marL="0">
+            <a:pPr marL="0" indent="0" algn="r">
               <a:buNone/>
             </a:pPr>
             <a:r>
@@ -5370,9 +4870,9 @@
                 <a:solidFill>
                   <a:srgbClr val="A3ABBD"/>
                 </a:solidFill>
-                <a:latin typeface="Segoe UI" pitchFamily="34" charset="0"/>
-                <a:ea typeface="Segoe UI" pitchFamily="34" charset="-122"/>
-                <a:cs typeface="Segoe UI" pitchFamily="34" charset="-120"/>
+                <a:latin typeface="Segoe UI" panose="020B0502040204020203" pitchFamily="34" charset="0"/>
+                <a:ea typeface="Segoe UI" panose="020B0502040204020203" pitchFamily="34" charset="-122"/>
+                <a:cs typeface="Segoe UI" panose="020B0502040204020203" pitchFamily="34" charset="-120"/>
               </a:rPr>
               <a:t>04 · Business case</a:t>
             </a:r>
@@ -5380,6 +4880,30 @@
           </a:p>
         </p:txBody>
       </p:sp>
+      <p:pic>
+        <p:nvPicPr>
+          <p:cNvPr id="45" name="Picture 44" descr="images"/>
+          <p:cNvPicPr>
+            <a:picLocks noChangeAspect="1"/>
+          </p:cNvPicPr>
+          <p:nvPr/>
+        </p:nvPicPr>
+        <p:blipFill>
+          <a:blip r:embed="rId1"/>
+          <a:stretch>
+            <a:fillRect/>
+          </a:stretch>
+        </p:blipFill>
+        <p:spPr>
+          <a:xfrm>
+            <a:off x="1407160" y="4218305"/>
+            <a:ext cx="2146935" cy="1249680"/>
+          </a:xfrm>
+          <a:prstGeom prst="rect">
+            <a:avLst/>
+          </a:prstGeom>
+        </p:spPr>
+      </p:pic>
     </p:spTree>
   </p:cSld>
   <p:clrMapOvr>
@@ -5390,12 +4914,13 @@
 
 <file path=ppt/slides/slide5.xml><?xml version="1.0" encoding="utf-8"?>
 <p:sld xmlns:a="http://schemas.openxmlformats.org/drawingml/2006/main" xmlns:r="http://schemas.openxmlformats.org/officeDocument/2006/relationships" xmlns:p="http://schemas.openxmlformats.org/presentationml/2006/main">
-  <p:cSld name="Slide 5">
+  <p:cSld>
     <p:bg>
       <p:bgPr>
         <a:solidFill>
           <a:srgbClr val="14161C"/>
         </a:solidFill>
+        <a:effectLst/>
       </p:bgPr>
     </p:bg>
     <p:spTree>
@@ -5431,7 +4956,6 @@
               <a:alpha val="8000"/>
             </a:srgbClr>
           </a:solidFill>
-          <a:ln/>
         </p:spPr>
       </p:sp>
       <p:sp>
@@ -5448,7 +4972,6 @@
           <a:prstGeom prst="rect">
             <a:avLst/>
           </a:prstGeom>
-          <a:ln/>
         </p:spPr>
       </p:sp>
       <p:sp>
@@ -5466,13 +4989,12 @@
             <a:avLst/>
           </a:prstGeom>
           <a:noFill/>
-          <a:ln/>
         </p:spPr>
         <p:txBody>
           <a:bodyPr wrap="square" rtlCol="0" anchor="ctr"/>
           <a:lstStyle/>
           <a:p>
-            <a:pPr indent="0" marL="0">
+            <a:pPr marL="0" indent="0">
               <a:buNone/>
             </a:pPr>
             <a:r>
@@ -5480,9 +5002,9 @@
                 <a:solidFill>
                   <a:srgbClr val="F5F3EE"/>
                 </a:solidFill>
-                <a:latin typeface="Bahnschrift" pitchFamily="34" charset="0"/>
-                <a:ea typeface="Bahnschrift" pitchFamily="34" charset="-122"/>
-                <a:cs typeface="Bahnschrift" pitchFamily="34" charset="-120"/>
+                <a:latin typeface="Bahnschrift" panose="020B0502040204020203" pitchFamily="34" charset="0"/>
+                <a:ea typeface="Bahnschrift" panose="020B0502040204020203" pitchFamily="34" charset="-122"/>
+                <a:cs typeface="Bahnschrift" panose="020B0502040204020203" pitchFamily="34" charset="-120"/>
               </a:rPr>
               <a:t>Ce qu'on a déjà construit, et ce qu'on vous demande</a:t>
             </a:r>
@@ -5505,23 +5027,22 @@
             <a:avLst/>
           </a:prstGeom>
           <a:noFill/>
-          <a:ln/>
         </p:spPr>
         <p:txBody>
           <a:bodyPr wrap="square" rtlCol="0" anchor="ctr"/>
           <a:lstStyle/>
           <a:p>
-            <a:pPr algn="r" indent="0" marL="0">
-              <a:buNone/>
-            </a:pPr>
-            <a:r>
-              <a:rPr lang="en-US" sz="1100" b="1" spc="100" kern="0" dirty="0">
+            <a:pPr marL="0" indent="0" algn="r">
+              <a:buNone/>
+            </a:pPr>
+            <a:r>
+              <a:rPr lang="en-US" sz="1100" b="1" kern="0" spc="100" dirty="0">
                 <a:solidFill>
                   <a:srgbClr val="A3ABBD"/>
                 </a:solidFill>
-                <a:latin typeface="Bahnschrift" pitchFamily="34" charset="0"/>
-                <a:ea typeface="Bahnschrift" pitchFamily="34" charset="-122"/>
-                <a:cs typeface="Bahnschrift" pitchFamily="34" charset="-120"/>
+                <a:latin typeface="Bahnschrift" panose="020B0502040204020203" pitchFamily="34" charset="0"/>
+                <a:ea typeface="Bahnschrift" panose="020B0502040204020203" pitchFamily="34" charset="-122"/>
+                <a:cs typeface="Bahnschrift" panose="020B0502040204020203" pitchFamily="34" charset="-120"/>
               </a:rPr>
               <a:t>CESTOMCLASH228</a:t>
             </a:r>
@@ -5538,7 +5059,7 @@
         <p:spPr>
           <a:xfrm>
             <a:off x="640080" y="1965960"/>
-            <a:ext cx="10911535" cy="1783080"/>
+            <a:ext cx="8531352" cy="1783080"/>
           </a:xfrm>
           <a:prstGeom prst="roundRect">
             <a:avLst>
@@ -5554,7 +5075,7 @@
             <a:prstDash val="solid"/>
           </a:ln>
           <a:effectLst>
-            <a:outerShdw sx="100000" sy="100000" kx="0" ky="0" algn="bl" rotWithShape="0" blurRad="101600" dist="50800" dir="16200000">
+            <a:outerShdw blurRad="101600" dist="50800" dir="16200000" algn="bl" rotWithShape="0">
               <a:srgbClr val="3FE0FF">
                 <a:alpha val="28000"/>
               </a:srgbClr>
@@ -5571,7 +5092,7 @@
         <p:spPr>
           <a:xfrm>
             <a:off x="814822" y="1975104"/>
-            <a:ext cx="10562052" cy="18288"/>
+            <a:ext cx="8181868" cy="18288"/>
           </a:xfrm>
           <a:prstGeom prst="rect">
             <a:avLst/>
@@ -5581,7 +5102,6 @@
               <a:alpha val="65000"/>
             </a:srgbClr>
           </a:solidFill>
-          <a:ln/>
         </p:spPr>
       </p:sp>
       <p:sp>
@@ -5592,14 +5112,13 @@
         </p:nvSpPr>
         <p:spPr>
           <a:xfrm>
-            <a:off x="960120" y="2148840"/>
-            <a:ext cx="10271455" cy="1463040"/>
-          </a:xfrm>
-          <a:prstGeom prst="rect">
-            <a:avLst/>
-          </a:prstGeom>
-          <a:noFill/>
-          <a:ln/>
+            <a:off x="914400" y="2121408"/>
+            <a:ext cx="7982712" cy="1508760"/>
+          </a:xfrm>
+          <a:prstGeom prst="rect">
+            <a:avLst/>
+          </a:prstGeom>
+          <a:noFill/>
         </p:spPr>
         <p:txBody>
           <a:bodyPr wrap="square" rtlCol="0" anchor="t"/>
@@ -5607,86 +5126,86 @@
           <a:p>
             <a:pPr marL="342900" indent="-342900">
               <a:lnSpc>
-                <a:spcPct val="145000"/>
+                <a:spcPct val="135000"/>
               </a:lnSpc>
               <a:buSzPct val="100000"/>
               <a:buChar char="▸"/>
             </a:pPr>
             <a:r>
-              <a:rPr lang="en-US" sz="1300" dirty="0">
+              <a:rPr lang="en-US" sz="1150" dirty="0">
                 <a:solidFill>
                   <a:srgbClr val="F5F3EE"/>
                 </a:solidFill>
-                <a:latin typeface="Segoe UI" pitchFamily="34" charset="0"/>
-                <a:ea typeface="Segoe UI" pitchFamily="34" charset="-122"/>
-                <a:cs typeface="Segoe UI" pitchFamily="34" charset="-120"/>
-              </a:rPr>
-              <a:t>Carte, demandes d'aide, authentification, gouvernance à 2 niveaux — code fonctionnel, testé (59/59 tests automatisés)</a:t>
-            </a:r>
-            <a:endParaRPr lang="en-US" sz="1300" dirty="0"/>
+                <a:latin typeface="Segoe UI" panose="020B0502040204020203" pitchFamily="34" charset="0"/>
+                <a:ea typeface="Segoe UI" panose="020B0502040204020203" pitchFamily="34" charset="-122"/>
+                <a:cs typeface="Segoe UI" panose="020B0502040204020203" pitchFamily="34" charset="-120"/>
+              </a:rPr>
+              <a:t>Carte, Pins, Bounties gratuites et payantes, authentification — 83/83 tests automatisés</a:t>
+            </a:r>
+            <a:endParaRPr lang="en-US" sz="1150" dirty="0"/>
           </a:p>
           <a:p>
             <a:pPr marL="342900" indent="-342900">
               <a:lnSpc>
-                <a:spcPct val="145000"/>
+                <a:spcPct val="135000"/>
               </a:lnSpc>
               <a:buSzPct val="100000"/>
               <a:buChar char="▸"/>
             </a:pPr>
             <a:r>
-              <a:rPr lang="en-US" sz="1300" dirty="0">
+              <a:rPr lang="en-US" sz="1150" dirty="0">
                 <a:solidFill>
                   <a:srgbClr val="F5F3EE"/>
                 </a:solidFill>
-                <a:latin typeface="Segoe UI" pitchFamily="34" charset="0"/>
-                <a:ea typeface="Segoe UI" pitchFamily="34" charset="-122"/>
-                <a:cs typeface="Segoe UI" pitchFamily="34" charset="-120"/>
-              </a:rPr>
-              <a:t>Direction visuelle afro-futuriste appliquée au produit réel (palette, écran d'accueil)</a:t>
-            </a:r>
-            <a:endParaRPr lang="en-US" sz="1300" dirty="0"/>
+                <a:latin typeface="Segoe UI" panose="020B0502040204020203" pitchFamily="34" charset="0"/>
+                <a:ea typeface="Segoe UI" panose="020B0502040204020203" pitchFamily="34" charset="-122"/>
+                <a:cs typeface="Segoe UI" panose="020B0502040204020203" pitchFamily="34" charset="-120"/>
+              </a:rPr>
+              <a:t>Marché de confiance payant : offres, réputation calculée, testé sous accès concurrent réel</a:t>
+            </a:r>
+            <a:endParaRPr lang="en-US" sz="1150" dirty="0"/>
           </a:p>
           <a:p>
             <a:pPr marL="342900" indent="-342900">
               <a:lnSpc>
-                <a:spcPct val="145000"/>
+                <a:spcPct val="135000"/>
               </a:lnSpc>
               <a:buSzPct val="100000"/>
               <a:buChar char="▸"/>
             </a:pPr>
             <a:r>
-              <a:rPr lang="en-US" sz="1300" dirty="0">
+              <a:rPr lang="en-US" sz="1150" dirty="0">
                 <a:solidFill>
                   <a:srgbClr val="F5F3EE"/>
                 </a:solidFill>
-                <a:latin typeface="Segoe UI" pitchFamily="34" charset="0"/>
-                <a:ea typeface="Segoe UI" pitchFamily="34" charset="-122"/>
-                <a:cs typeface="Segoe UI" pitchFamily="34" charset="-120"/>
+                <a:latin typeface="Segoe UI" panose="020B0502040204020203" pitchFamily="34" charset="0"/>
+                <a:ea typeface="Segoe UI" panose="020B0502040204020203" pitchFamily="34" charset="-122"/>
+                <a:cs typeface="Segoe UI" panose="020B0502040204020203" pitchFamily="34" charset="-120"/>
               </a:rPr>
               <a:t>Sponsoring vérifié + notation : construits, testés bout-en-bout, audités avant mise en ligne</a:t>
             </a:r>
-            <a:endParaRPr lang="en-US" sz="1300" dirty="0"/>
+            <a:endParaRPr lang="en-US" sz="1150" dirty="0"/>
           </a:p>
           <a:p>
             <a:pPr marL="342900" indent="-342900">
               <a:lnSpc>
-                <a:spcPct val="145000"/>
+                <a:spcPct val="135000"/>
               </a:lnSpc>
               <a:buSzPct val="100000"/>
               <a:buChar char="▸"/>
             </a:pPr>
             <a:r>
-              <a:rPr lang="en-US" sz="1300" dirty="0">
+              <a:rPr lang="en-US" sz="1150" dirty="0">
                 <a:solidFill>
                   <a:srgbClr val="F5F3EE"/>
                 </a:solidFill>
-                <a:latin typeface="Segoe UI" pitchFamily="34" charset="0"/>
-                <a:ea typeface="Segoe UI" pitchFamily="34" charset="-122"/>
-                <a:cs typeface="Segoe UI" pitchFamily="34" charset="-120"/>
+                <a:latin typeface="Segoe UI" panose="020B0502040204020203" pitchFamily="34" charset="0"/>
+                <a:ea typeface="Segoe UI" panose="020B0502040204020203" pitchFamily="34" charset="-122"/>
+                <a:cs typeface="Segoe UI" panose="020B0502040204020203" pitchFamily="34" charset="-120"/>
               </a:rPr>
               <a:t>Hébergement 100 % gratuit (aucune carte bancaire engagée) — marge protégée dès le 1er sponsor</a:t>
             </a:r>
-            <a:endParaRPr lang="en-US" sz="1300" dirty="0"/>
+            <a:endParaRPr lang="en-US" sz="1150" dirty="0"/>
           </a:p>
         </p:txBody>
       </p:sp>
@@ -5699,7 +5218,7 @@
         <p:spPr>
           <a:xfrm>
             <a:off x="640080" y="3977640"/>
-            <a:ext cx="10911535" cy="1143000"/>
+            <a:ext cx="8531352" cy="1143000"/>
           </a:xfrm>
           <a:prstGeom prst="roundRect">
             <a:avLst>
@@ -5715,7 +5234,7 @@
             <a:prstDash val="solid"/>
           </a:ln>
           <a:effectLst>
-            <a:outerShdw sx="100000" sy="100000" kx="0" ky="0" algn="bl" rotWithShape="0" blurRad="101600" dist="50800" dir="16200000">
+            <a:outerShdw blurRad="101600" dist="50800" dir="16200000" algn="bl" rotWithShape="0">
               <a:srgbClr val="FFC94D">
                 <a:alpha val="28000"/>
               </a:srgbClr>
@@ -5732,7 +5251,7 @@
         <p:spPr>
           <a:xfrm>
             <a:off x="752094" y="3986784"/>
-            <a:ext cx="10687507" cy="18288"/>
+            <a:ext cx="8307324" cy="18288"/>
           </a:xfrm>
           <a:prstGeom prst="rect">
             <a:avLst/>
@@ -5742,7 +5261,6 @@
               <a:alpha val="65000"/>
             </a:srgbClr>
           </a:solidFill>
-          <a:ln/>
         </p:spPr>
       </p:sp>
       <p:sp>
@@ -5753,60 +5271,207 @@
         </p:nvSpPr>
         <p:spPr>
           <a:xfrm>
-            <a:off x="960120" y="3977640"/>
-            <a:ext cx="10271455" cy="1143000"/>
-          </a:xfrm>
-          <a:prstGeom prst="rect">
-            <a:avLst/>
-          </a:prstGeom>
-          <a:noFill/>
-          <a:ln/>
+            <a:off x="914400" y="3977640"/>
+            <a:ext cx="7982712" cy="1143000"/>
+          </a:xfrm>
+          <a:prstGeom prst="rect">
+            <a:avLst/>
+          </a:prstGeom>
+          <a:noFill/>
         </p:spPr>
         <p:txBody>
           <a:bodyPr wrap="square" rtlCol="0" anchor="ctr"/>
           <a:lstStyle/>
           <a:p>
-            <a:pPr indent="0" marL="0">
+            <a:pPr marL="0" indent="0">
               <a:lnSpc>
                 <a:spcPct val="130000"/>
               </a:lnSpc>
               <a:buNone/>
             </a:pPr>
             <a:r>
-              <a:rPr lang="en-US" sz="1300" b="1" dirty="0">
+              <a:rPr lang="en-US" sz="1200" b="1" dirty="0">
                 <a:solidFill>
                   <a:srgbClr val="FFC94D"/>
                 </a:solidFill>
-                <a:latin typeface="Segoe UI" pitchFamily="34" charset="0"/>
-                <a:ea typeface="Segoe UI" pitchFamily="34" charset="-122"/>
-                <a:cs typeface="Segoe UI" pitchFamily="34" charset="-120"/>
+                <a:latin typeface="Segoe UI" panose="020B0502040204020203" pitchFamily="34" charset="0"/>
+                <a:ea typeface="Segoe UI" panose="020B0502040204020203" pitchFamily="34" charset="-122"/>
+                <a:cs typeface="Segoe UI" panose="020B0502040204020203" pitchFamily="34" charset="-120"/>
               </a:rPr>
               <a:t>Ce qu'on demande : </a:t>
             </a:r>
-            <a:pPr indent="0" marL="0">
-              <a:lnSpc>
-                <a:spcPct val="130000"/>
-              </a:lnSpc>
-              <a:buNone/>
-            </a:pPr>
-            <a:r>
-              <a:rPr lang="en-US" sz="1300" i="1" dirty="0">
+            <a:r>
+              <a:rPr lang="en-US" sz="1200" i="1" dirty="0">
                 <a:solidFill>
                   <a:srgbClr val="A3ABBD"/>
                 </a:solidFill>
-                <a:latin typeface="Segoe UI" pitchFamily="34" charset="0"/>
-                <a:ea typeface="Segoe UI" pitchFamily="34" charset="-122"/>
-                <a:cs typeface="Segoe UI" pitchFamily="34" charset="-120"/>
+                <a:latin typeface="Segoe UI" panose="020B0502040204020203" pitchFamily="34" charset="0"/>
+                <a:ea typeface="Segoe UI" panose="020B0502040204020203" pitchFamily="34" charset="-122"/>
+                <a:cs typeface="Segoe UI" panose="020B0502040204020203" pitchFamily="34" charset="-120"/>
               </a:rPr>
               <a:t>De la visibilité — l'exposition du concours suffit à amorcer la traction. Le reste suivra naturellement.</a:t>
             </a:r>
-            <a:endParaRPr lang="en-US" sz="1300" dirty="0"/>
-          </a:p>
-        </p:txBody>
-      </p:sp>
-      <p:sp>
-        <p:nvSpPr>
-          <p:cNvPr id="12" name="Text 10"/>
+            <a:endParaRPr lang="en-US" sz="1200" dirty="0"/>
+          </a:p>
+        </p:txBody>
+      </p:sp>
+      <p:sp>
+        <p:nvSpPr>
+          <p:cNvPr id="12" name="Shape 10"/>
+          <p:cNvSpPr/>
+          <p:nvPr/>
+        </p:nvSpPr>
+        <p:spPr>
+          <a:xfrm>
+            <a:off x="9445752" y="1965960"/>
+            <a:ext cx="2105863" cy="3154680"/>
+          </a:xfrm>
+          <a:prstGeom prst="roundRect">
+            <a:avLst>
+              <a:gd name="adj" fmla="val 3040"/>
+            </a:avLst>
+          </a:prstGeom>
+          <a:ln w="12700">
+            <a:solidFill>
+              <a:srgbClr val="2FE894">
+                <a:alpha val="70000"/>
+              </a:srgbClr>
+            </a:solidFill>
+            <a:prstDash val="solid"/>
+          </a:ln>
+          <a:effectLst>
+            <a:outerShdw blurRad="101600" dist="50800" dir="16200000" algn="bl" rotWithShape="0">
+              <a:srgbClr val="2FE894">
+                <a:alpha val="28000"/>
+              </a:srgbClr>
+            </a:outerShdw>
+          </a:effectLst>
+        </p:spPr>
+      </p:sp>
+      <p:sp>
+        <p:nvSpPr>
+          <p:cNvPr id="13" name="Shape 11"/>
+          <p:cNvSpPr/>
+          <p:nvPr/>
+        </p:nvSpPr>
+        <p:spPr>
+          <a:xfrm>
+            <a:off x="9754911" y="1975104"/>
+            <a:ext cx="1487546" cy="18288"/>
+          </a:xfrm>
+          <a:prstGeom prst="rect">
+            <a:avLst/>
+          </a:prstGeom>
+          <a:solidFill>
+            <a:srgbClr val="2FE894">
+              <a:alpha val="65000"/>
+            </a:srgbClr>
+          </a:solidFill>
+        </p:spPr>
+      </p:sp>
+      <p:sp>
+        <p:nvSpPr>
+          <p:cNvPr id="14" name="Text 12"/>
+          <p:cNvSpPr/>
+          <p:nvPr/>
+        </p:nvSpPr>
+        <p:spPr>
+          <a:xfrm>
+            <a:off x="9582912" y="2121408"/>
+            <a:ext cx="1831543" cy="320040"/>
+          </a:xfrm>
+          <a:prstGeom prst="rect">
+            <a:avLst/>
+          </a:prstGeom>
+          <a:noFill/>
+        </p:spPr>
+        <p:txBody>
+          <a:bodyPr wrap="square" rtlCol="0" anchor="ctr"/>
+          <a:lstStyle/>
+          <a:p>
+            <a:pPr marL="0" indent="0" algn="ctr">
+              <a:buNone/>
+            </a:pPr>
+            <a:r>
+              <a:rPr lang="en-US" sz="1100" b="1" dirty="0">
+                <a:solidFill>
+                  <a:srgbClr val="F5F3EE"/>
+                </a:solidFill>
+                <a:latin typeface="Bahnschrift" panose="020B0502040204020203" pitchFamily="34" charset="0"/>
+                <a:ea typeface="Bahnschrift" panose="020B0502040204020203" pitchFamily="34" charset="-122"/>
+                <a:cs typeface="Bahnschrift" panose="020B0502040204020203" pitchFamily="34" charset="-120"/>
+              </a:rPr>
+              <a:t>Scanne pour tester</a:t>
+            </a:r>
+            <a:endParaRPr lang="en-US" sz="1100" dirty="0"/>
+          </a:p>
+        </p:txBody>
+      </p:sp>
+      <p:pic>
+        <p:nvPicPr>
+          <p:cNvPr id="15" name="Image 0" descr="C:\Users\Wilfried\OneDrive\Bureau\Wilfried\professionnel\CreaAfrica\pitch\qr-app-link.png"/>
+          <p:cNvPicPr>
+            <a:picLocks noChangeAspect="1"/>
+          </p:cNvPicPr>
+          <p:nvPr/>
+        </p:nvPicPr>
+        <p:blipFill>
+          <a:blip r:embed="rId1"/>
+          <a:stretch>
+            <a:fillRect/>
+          </a:stretch>
+        </p:blipFill>
+        <p:spPr>
+          <a:xfrm>
+            <a:off x="9721444" y="2487168"/>
+            <a:ext cx="1554480" cy="1554480"/>
+          </a:xfrm>
+          <a:prstGeom prst="rect">
+            <a:avLst/>
+          </a:prstGeom>
+        </p:spPr>
+      </p:pic>
+      <p:sp>
+        <p:nvSpPr>
+          <p:cNvPr id="16" name="Text 13"/>
+          <p:cNvSpPr/>
+          <p:nvPr/>
+        </p:nvSpPr>
+        <p:spPr>
+          <a:xfrm>
+            <a:off x="9537192" y="4151376"/>
+            <a:ext cx="1922983" cy="274320"/>
+          </a:xfrm>
+          <a:prstGeom prst="rect">
+            <a:avLst/>
+          </a:prstGeom>
+          <a:noFill/>
+        </p:spPr>
+        <p:txBody>
+          <a:bodyPr wrap="square" rtlCol="0" anchor="ctr"/>
+          <a:lstStyle/>
+          <a:p>
+            <a:pPr marL="0" indent="0" algn="ctr">
+              <a:buNone/>
+            </a:pPr>
+            <a:r>
+              <a:rPr lang="en-US" sz="900" dirty="0">
+                <a:solidFill>
+                  <a:srgbClr val="A3ABBD"/>
+                </a:solidFill>
+                <a:latin typeface="Segoe UI" panose="020B0502040204020203" pitchFamily="34" charset="0"/>
+                <a:ea typeface="Segoe UI" panose="020B0502040204020203" pitchFamily="34" charset="-122"/>
+                <a:cs typeface="Segoe UI" panose="020B0502040204020203" pitchFamily="34" charset="-120"/>
+              </a:rPr>
+              <a:t>cestomclash228.web.app</a:t>
+            </a:r>
+            <a:endParaRPr lang="en-US" sz="900" dirty="0"/>
+          </a:p>
+        </p:txBody>
+      </p:sp>
+      <p:sp>
+        <p:nvSpPr>
+          <p:cNvPr id="17" name="Text 14"/>
           <p:cNvSpPr/>
           <p:nvPr/>
         </p:nvSpPr>
@@ -5819,23 +5484,22 @@
             <a:avLst/>
           </a:prstGeom>
           <a:noFill/>
-          <a:ln/>
         </p:spPr>
         <p:txBody>
           <a:bodyPr wrap="square" rtlCol="0" anchor="ctr"/>
           <a:lstStyle/>
           <a:p>
-            <a:pPr algn="ctr" indent="0" marL="0">
-              <a:buNone/>
-            </a:pPr>
-            <a:r>
-              <a:rPr lang="en-US" sz="1500" b="1" spc="100" kern="0" dirty="0">
+            <a:pPr marL="0" indent="0" algn="ctr">
+              <a:buNone/>
+            </a:pPr>
+            <a:r>
+              <a:rPr lang="en-US" sz="1500" b="1" kern="0" spc="100" dirty="0">
                 <a:solidFill>
                   <a:srgbClr val="3FE0FF"/>
                 </a:solidFill>
-                <a:latin typeface="Bahnschrift" pitchFamily="34" charset="0"/>
-                <a:ea typeface="Bahnschrift" pitchFamily="34" charset="-122"/>
-                <a:cs typeface="Bahnschrift" pitchFamily="34" charset="-120"/>
+                <a:latin typeface="Bahnschrift" panose="020B0502040204020203" pitchFamily="34" charset="0"/>
+                <a:ea typeface="Bahnschrift" panose="020B0502040204020203" pitchFamily="34" charset="-122"/>
+                <a:cs typeface="Bahnschrift" panose="020B0502040204020203" pitchFamily="34" charset="-120"/>
               </a:rPr>
               <a:t>Explore. Partage. Level-up.</a:t>
             </a:r>
@@ -5845,7 +5509,7 @@
       </p:sp>
       <p:sp>
         <p:nvSpPr>
-          <p:cNvPr id="13" name="Text 11"/>
+          <p:cNvPr id="18" name="Text 15"/>
           <p:cNvSpPr/>
           <p:nvPr/>
         </p:nvSpPr>
@@ -5858,13 +5522,12 @@
             <a:avLst/>
           </a:prstGeom>
           <a:noFill/>
-          <a:ln/>
         </p:spPr>
         <p:txBody>
           <a:bodyPr wrap="square" rtlCol="0" anchor="ctr"/>
           <a:lstStyle/>
           <a:p>
-            <a:pPr algn="ctr" indent="0" marL="0">
+            <a:pPr marL="0" indent="0" algn="ctr">
               <a:buNone/>
             </a:pPr>
             <a:r>
@@ -5872,9 +5535,9 @@
                 <a:solidFill>
                   <a:srgbClr val="A3ABBD"/>
                 </a:solidFill>
-                <a:latin typeface="Segoe UI" pitchFamily="34" charset="0"/>
-                <a:ea typeface="Segoe UI" pitchFamily="34" charset="-122"/>
-                <a:cs typeface="Segoe UI" pitchFamily="34" charset="-120"/>
+                <a:latin typeface="Segoe UI" panose="020B0502040204020203" pitchFamily="34" charset="0"/>
+                <a:ea typeface="Segoe UI" panose="020B0502040204020203" pitchFamily="34" charset="-122"/>
+                <a:cs typeface="Segoe UI" panose="020B0502040204020203" pitchFamily="34" charset="-120"/>
               </a:rPr>
               <a:t>Wilfried TSETSE · CESTOM · tsetsewilfried@gmail.com</a:t>
             </a:r>
@@ -5884,7 +5547,7 @@
       </p:sp>
       <p:sp>
         <p:nvSpPr>
-          <p:cNvPr id="14" name="Text 12"/>
+          <p:cNvPr id="19" name="Text 16"/>
           <p:cNvSpPr/>
           <p:nvPr/>
         </p:nvSpPr>
@@ -5897,37 +5560,33 @@
             <a:avLst/>
           </a:prstGeom>
           <a:noFill/>
-          <a:ln/>
         </p:spPr>
         <p:txBody>
           <a:bodyPr wrap="square" rtlCol="0" anchor="ctr"/>
           <a:lstStyle/>
           <a:p>
-            <a:pPr indent="0" marL="0">
-              <a:buNone/>
-            </a:pPr>
-            <a:r>
-              <a:rPr lang="en-US" sz="1000" b="1" spc="100" kern="0" dirty="0">
+            <a:pPr marL="0" indent="0">
+              <a:buNone/>
+            </a:pPr>
+            <a:r>
+              <a:rPr lang="en-US" sz="1000" b="1" kern="0" spc="100" dirty="0">
                 <a:solidFill>
                   <a:srgbClr val="A3ABBD"/>
                 </a:solidFill>
-                <a:latin typeface="Bahnschrift" pitchFamily="34" charset="0"/>
-                <a:ea typeface="Bahnschrift" pitchFamily="34" charset="-122"/>
-                <a:cs typeface="Bahnschrift" pitchFamily="34" charset="-120"/>
+                <a:latin typeface="Bahnschrift" panose="020B0502040204020203" pitchFamily="34" charset="0"/>
+                <a:ea typeface="Bahnschrift" panose="020B0502040204020203" pitchFamily="34" charset="-122"/>
+                <a:cs typeface="Bahnschrift" panose="020B0502040204020203" pitchFamily="34" charset="-120"/>
               </a:rPr>
               <a:t>CESTOMCLASH228  </a:t>
             </a:r>
-            <a:pPr indent="0" marL="0">
-              <a:buNone/>
-            </a:pPr>
-            <a:r>
-              <a:rPr lang="en-US" sz="1000" spc="100" kern="0" dirty="0">
+            <a:r>
+              <a:rPr lang="en-US" sz="1000" kern="0" spc="100" dirty="0">
                 <a:solidFill>
                   <a:srgbClr val="A3ABBD"/>
                 </a:solidFill>
-                <a:latin typeface="Bahnschrift" pitchFamily="34" charset="0"/>
-                <a:ea typeface="Bahnschrift" pitchFamily="34" charset="-122"/>
-                <a:cs typeface="Bahnschrift" pitchFamily="34" charset="-120"/>
+                <a:latin typeface="Bahnschrift" panose="020B0502040204020203" pitchFamily="34" charset="0"/>
+                <a:ea typeface="Bahnschrift" panose="020B0502040204020203" pitchFamily="34" charset="-122"/>
+                <a:cs typeface="Bahnschrift" panose="020B0502040204020203" pitchFamily="34" charset="-120"/>
               </a:rPr>
               <a:t>· Explore. Partage. Level-up.</a:t>
             </a:r>
@@ -5937,7 +5596,7 @@
       </p:sp>
       <p:sp>
         <p:nvSpPr>
-          <p:cNvPr id="15" name="Text 13"/>
+          <p:cNvPr id="20" name="Text 17"/>
           <p:cNvSpPr/>
           <p:nvPr/>
         </p:nvSpPr>
@@ -5950,13 +5609,12 @@
             <a:avLst/>
           </a:prstGeom>
           <a:noFill/>
-          <a:ln/>
         </p:spPr>
         <p:txBody>
           <a:bodyPr wrap="square" rtlCol="0" anchor="ctr"/>
           <a:lstStyle/>
           <a:p>
-            <a:pPr algn="r" indent="0" marL="0">
+            <a:pPr marL="0" indent="0" algn="r">
               <a:buNone/>
             </a:pPr>
             <a:r>
@@ -5964,9 +5622,9 @@
                 <a:solidFill>
                   <a:srgbClr val="A3ABBD"/>
                 </a:solidFill>
-                <a:latin typeface="Segoe UI" pitchFamily="34" charset="0"/>
-                <a:ea typeface="Segoe UI" pitchFamily="34" charset="-122"/>
-                <a:cs typeface="Segoe UI" pitchFamily="34" charset="-120"/>
+                <a:latin typeface="Segoe UI" panose="020B0502040204020203" pitchFamily="34" charset="0"/>
+                <a:ea typeface="Segoe UI" panose="020B0502040204020203" pitchFamily="34" charset="-122"/>
+                <a:cs typeface="Segoe UI" panose="020B0502040204020203" pitchFamily="34" charset="-120"/>
               </a:rPr>
               <a:t>05 · Conclusion</a:t>
             </a:r>
@@ -6025,7 +5683,7 @@
     </a:clrScheme>
     <a:fontScheme name="Office">
       <a:majorFont>
-        <a:latin typeface="Calibri Light" panose="020F0302020204030204"/>
+        <a:latin typeface="Calibri Light"/>
         <a:ea typeface=""/>
         <a:cs typeface=""/>
         <a:font script="Jpan" typeface="游ゴシック Light"/>
@@ -6058,26 +5716,9 @@
         <a:font script="Viet" typeface="Times New Roman"/>
         <a:font script="Uigh" typeface="Microsoft Uighur"/>
         <a:font script="Geor" typeface="Sylfaen"/>
-        <a:font script="Armn" typeface="Arial"/>
-        <a:font script="Bugi" typeface="Leelawadee UI"/>
-        <a:font script="Bopo" typeface="Microsoft JhengHei"/>
-        <a:font script="Java" typeface="Javanese Text"/>
-        <a:font script="Lisu" typeface="Segoe UI"/>
-        <a:font script="Mymr" typeface="Myanmar Text"/>
-        <a:font script="Nkoo" typeface="Ebrima"/>
-        <a:font script="Olck" typeface="Nirmala UI"/>
-        <a:font script="Osma" typeface="Ebrima"/>
-        <a:font script="Phag" typeface="Phagspa"/>
-        <a:font script="Syrn" typeface="Estrangelo Edessa"/>
-        <a:font script="Syrj" typeface="Estrangelo Edessa"/>
-        <a:font script="Syre" typeface="Estrangelo Edessa"/>
-        <a:font script="Sora" typeface="Nirmala UI"/>
-        <a:font script="Tale" typeface="Microsoft Tai Le"/>
-        <a:font script="Talu" typeface="Microsoft New Tai Lue"/>
-        <a:font script="Tfng" typeface="Ebrima"/>
       </a:majorFont>
       <a:minorFont>
-        <a:latin typeface="Calibri" panose="020F0502020204030204"/>
+        <a:latin typeface="Calibri"/>
         <a:ea typeface=""/>
         <a:cs typeface=""/>
         <a:font script="Jpan" typeface="游ゴシック"/>
@@ -6110,23 +5751,6 @@
         <a:font script="Viet" typeface="Arial"/>
         <a:font script="Uigh" typeface="Microsoft Uighur"/>
         <a:font script="Geor" typeface="Sylfaen"/>
-        <a:font script="Armn" typeface="Arial"/>
-        <a:font script="Bugi" typeface="Leelawadee UI"/>
-        <a:font script="Bopo" typeface="Microsoft JhengHei"/>
-        <a:font script="Java" typeface="Javanese Text"/>
-        <a:font script="Lisu" typeface="Segoe UI"/>
-        <a:font script="Mymr" typeface="Myanmar Text"/>
-        <a:font script="Nkoo" typeface="Ebrima"/>
-        <a:font script="Olck" typeface="Nirmala UI"/>
-        <a:font script="Osma" typeface="Ebrima"/>
-        <a:font script="Phag" typeface="Phagspa"/>
-        <a:font script="Syrn" typeface="Estrangelo Edessa"/>
-        <a:font script="Syrj" typeface="Estrangelo Edessa"/>
-        <a:font script="Syre" typeface="Estrangelo Edessa"/>
-        <a:font script="Sora" typeface="Nirmala UI"/>
-        <a:font script="Tale" typeface="Microsoft Tai Le"/>
-        <a:font script="Talu" typeface="Microsoft New Tai Lue"/>
-        <a:font script="Tfng" typeface="Ebrima"/>
       </a:minorFont>
     </a:fontScheme>
     <a:fmtScheme name="Office">
@@ -6267,8 +5891,265 @@
       </a:bgFillStyleLst>
     </a:fmtScheme>
   </a:themeElements>
-  <a:objectDefaults/>
-  <a:extraClrSchemeLst/>
+  <a:extLst>
+    <a:ext uri="{05A4C25C-085E-4340-85A3-A5531E510DB2}">
+      <thm15:themeFamily xmlns:thm15="http://schemas.microsoft.com/office/thememl/2012/main" name="Office Theme" id="{62F939B6-93AF-4DB8-9C6B-D6C7DFDC589F}" vid="{4A3C46E8-61CC-4603-A589-7422A47A8E4A}"/>
+    </a:ext>
+  </a:extLst>
+</a:theme>
+</file>
+
+<file path=ppt/theme/theme2.xml><?xml version="1.0" encoding="utf-8"?>
+<a:theme xmlns:a="http://schemas.openxmlformats.org/drawingml/2006/main" name="Office Theme">
+  <a:themeElements>
+    <a:clrScheme name="Office">
+      <a:dk1>
+        <a:sysClr val="windowText" lastClr="000000"/>
+      </a:dk1>
+      <a:lt1>
+        <a:sysClr val="window" lastClr="FFFFFF"/>
+      </a:lt1>
+      <a:dk2>
+        <a:srgbClr val="44546A"/>
+      </a:dk2>
+      <a:lt2>
+        <a:srgbClr val="E7E6E6"/>
+      </a:lt2>
+      <a:accent1>
+        <a:srgbClr val="4472C4"/>
+      </a:accent1>
+      <a:accent2>
+        <a:srgbClr val="ED7D31"/>
+      </a:accent2>
+      <a:accent3>
+        <a:srgbClr val="A5A5A5"/>
+      </a:accent3>
+      <a:accent4>
+        <a:srgbClr val="FFC000"/>
+      </a:accent4>
+      <a:accent5>
+        <a:srgbClr val="5B9BD5"/>
+      </a:accent5>
+      <a:accent6>
+        <a:srgbClr val="70AD47"/>
+      </a:accent6>
+      <a:hlink>
+        <a:srgbClr val="0563C1"/>
+      </a:hlink>
+      <a:folHlink>
+        <a:srgbClr val="954F72"/>
+      </a:folHlink>
+    </a:clrScheme>
+    <a:fontScheme name="Office">
+      <a:majorFont>
+        <a:latin typeface="Calibri Light"/>
+        <a:ea typeface=""/>
+        <a:cs typeface=""/>
+        <a:font script="Jpan" typeface="游ゴシック Light"/>
+        <a:font script="Hang" typeface="맑은 고딕"/>
+        <a:font script="Hans" typeface="等线 Light"/>
+        <a:font script="Hant" typeface="新細明體"/>
+        <a:font script="Arab" typeface="Times New Roman"/>
+        <a:font script="Hebr" typeface="Times New Roman"/>
+        <a:font script="Thai" typeface="Angsana New"/>
+        <a:font script="Ethi" typeface="Nyala"/>
+        <a:font script="Beng" typeface="Vrinda"/>
+        <a:font script="Gujr" typeface="Shruti"/>
+        <a:font script="Khmr" typeface="MoolBoran"/>
+        <a:font script="Knda" typeface="Tunga"/>
+        <a:font script="Guru" typeface="Raavi"/>
+        <a:font script="Cans" typeface="Euphemia"/>
+        <a:font script="Cher" typeface="Plantagenet Cherokee"/>
+        <a:font script="Yiii" typeface="Microsoft Yi Baiti"/>
+        <a:font script="Tibt" typeface="Microsoft Himalaya"/>
+        <a:font script="Thaa" typeface="MV Boli"/>
+        <a:font script="Deva" typeface="Mangal"/>
+        <a:font script="Telu" typeface="Gautami"/>
+        <a:font script="Taml" typeface="Latha"/>
+        <a:font script="Syrc" typeface="Estrangelo Edessa"/>
+        <a:font script="Orya" typeface="Kalinga"/>
+        <a:font script="Mlym" typeface="Kartika"/>
+        <a:font script="Laoo" typeface="DokChampa"/>
+        <a:font script="Sinh" typeface="Iskoola Pota"/>
+        <a:font script="Mong" typeface="Mongolian Baiti"/>
+        <a:font script="Viet" typeface="Times New Roman"/>
+        <a:font script="Uigh" typeface="Microsoft Uighur"/>
+        <a:font script="Geor" typeface="Sylfaen"/>
+      </a:majorFont>
+      <a:minorFont>
+        <a:latin typeface="Calibri"/>
+        <a:ea typeface=""/>
+        <a:cs typeface=""/>
+        <a:font script="Jpan" typeface="游ゴシック"/>
+        <a:font script="Hang" typeface="맑은 고딕"/>
+        <a:font script="Hans" typeface="等线"/>
+        <a:font script="Hant" typeface="新細明體"/>
+        <a:font script="Arab" typeface="Arial"/>
+        <a:font script="Hebr" typeface="Arial"/>
+        <a:font script="Thai" typeface="Cordia New"/>
+        <a:font script="Ethi" typeface="Nyala"/>
+        <a:font script="Beng" typeface="Vrinda"/>
+        <a:font script="Gujr" typeface="Shruti"/>
+        <a:font script="Khmr" typeface="DaunPenh"/>
+        <a:font script="Knda" typeface="Tunga"/>
+        <a:font script="Guru" typeface="Raavi"/>
+        <a:font script="Cans" typeface="Euphemia"/>
+        <a:font script="Cher" typeface="Plantagenet Cherokee"/>
+        <a:font script="Yiii" typeface="Microsoft Yi Baiti"/>
+        <a:font script="Tibt" typeface="Microsoft Himalaya"/>
+        <a:font script="Thaa" typeface="MV Boli"/>
+        <a:font script="Deva" typeface="Mangal"/>
+        <a:font script="Telu" typeface="Gautami"/>
+        <a:font script="Taml" typeface="Latha"/>
+        <a:font script="Syrc" typeface="Estrangelo Edessa"/>
+        <a:font script="Orya" typeface="Kalinga"/>
+        <a:font script="Mlym" typeface="Kartika"/>
+        <a:font script="Laoo" typeface="DokChampa"/>
+        <a:font script="Sinh" typeface="Iskoola Pota"/>
+        <a:font script="Mong" typeface="Mongolian Baiti"/>
+        <a:font script="Viet" typeface="Arial"/>
+        <a:font script="Uigh" typeface="Microsoft Uighur"/>
+        <a:font script="Geor" typeface="Sylfaen"/>
+      </a:minorFont>
+    </a:fontScheme>
+    <a:fmtScheme name="Office">
+      <a:fillStyleLst>
+        <a:solidFill>
+          <a:schemeClr val="phClr"/>
+        </a:solidFill>
+        <a:gradFill rotWithShape="1">
+          <a:gsLst>
+            <a:gs pos="0">
+              <a:schemeClr val="phClr">
+                <a:lumMod val="110000"/>
+                <a:satMod val="105000"/>
+                <a:tint val="67000"/>
+              </a:schemeClr>
+            </a:gs>
+            <a:gs pos="50000">
+              <a:schemeClr val="phClr">
+                <a:lumMod val="105000"/>
+                <a:satMod val="103000"/>
+                <a:tint val="73000"/>
+              </a:schemeClr>
+            </a:gs>
+            <a:gs pos="100000">
+              <a:schemeClr val="phClr">
+                <a:lumMod val="105000"/>
+                <a:satMod val="109000"/>
+                <a:tint val="81000"/>
+              </a:schemeClr>
+            </a:gs>
+          </a:gsLst>
+          <a:lin ang="5400000" scaled="0"/>
+        </a:gradFill>
+        <a:gradFill rotWithShape="1">
+          <a:gsLst>
+            <a:gs pos="0">
+              <a:schemeClr val="phClr">
+                <a:satMod val="103000"/>
+                <a:lumMod val="102000"/>
+                <a:tint val="94000"/>
+              </a:schemeClr>
+            </a:gs>
+            <a:gs pos="50000">
+              <a:schemeClr val="phClr">
+                <a:satMod val="110000"/>
+                <a:lumMod val="100000"/>
+                <a:shade val="100000"/>
+              </a:schemeClr>
+            </a:gs>
+            <a:gs pos="100000">
+              <a:schemeClr val="phClr">
+                <a:lumMod val="99000"/>
+                <a:satMod val="120000"/>
+                <a:shade val="78000"/>
+              </a:schemeClr>
+            </a:gs>
+          </a:gsLst>
+          <a:lin ang="5400000" scaled="0"/>
+        </a:gradFill>
+      </a:fillStyleLst>
+      <a:lnStyleLst>
+        <a:ln w="6350" cap="flat" cmpd="sng" algn="ctr">
+          <a:solidFill>
+            <a:schemeClr val="phClr"/>
+          </a:solidFill>
+          <a:prstDash val="solid"/>
+          <a:miter lim="800000"/>
+        </a:ln>
+        <a:ln w="12700" cap="flat" cmpd="sng" algn="ctr">
+          <a:solidFill>
+            <a:schemeClr val="phClr"/>
+          </a:solidFill>
+          <a:prstDash val="solid"/>
+          <a:miter lim="800000"/>
+        </a:ln>
+        <a:ln w="19050" cap="flat" cmpd="sng" algn="ctr">
+          <a:solidFill>
+            <a:schemeClr val="phClr"/>
+          </a:solidFill>
+          <a:prstDash val="solid"/>
+          <a:miter lim="800000"/>
+        </a:ln>
+      </a:lnStyleLst>
+      <a:effectStyleLst>
+        <a:effectStyle>
+          <a:effectLst/>
+        </a:effectStyle>
+        <a:effectStyle>
+          <a:effectLst/>
+        </a:effectStyle>
+        <a:effectStyle>
+          <a:effectLst>
+            <a:outerShdw blurRad="57150" dist="19050" dir="5400000" algn="ctr" rotWithShape="0">
+              <a:srgbClr val="000000">
+                <a:alpha val="63000"/>
+              </a:srgbClr>
+            </a:outerShdw>
+          </a:effectLst>
+        </a:effectStyle>
+      </a:effectStyleLst>
+      <a:bgFillStyleLst>
+        <a:solidFill>
+          <a:schemeClr val="phClr"/>
+        </a:solidFill>
+        <a:solidFill>
+          <a:schemeClr val="phClr">
+            <a:tint val="95000"/>
+            <a:satMod val="170000"/>
+          </a:schemeClr>
+        </a:solidFill>
+        <a:gradFill rotWithShape="1">
+          <a:gsLst>
+            <a:gs pos="0">
+              <a:schemeClr val="phClr">
+                <a:tint val="93000"/>
+                <a:satMod val="150000"/>
+                <a:shade val="98000"/>
+                <a:lumMod val="102000"/>
+              </a:schemeClr>
+            </a:gs>
+            <a:gs pos="50000">
+              <a:schemeClr val="phClr">
+                <a:tint val="98000"/>
+                <a:satMod val="130000"/>
+                <a:shade val="90000"/>
+                <a:lumMod val="103000"/>
+              </a:schemeClr>
+            </a:gs>
+            <a:gs pos="100000">
+              <a:schemeClr val="phClr">
+                <a:shade val="63000"/>
+                <a:satMod val="120000"/>
+              </a:schemeClr>
+            </a:gs>
+          </a:gsLst>
+          <a:lin ang="5400000" scaled="0"/>
+        </a:gradFill>
+      </a:bgFillStyleLst>
+    </a:fmtScheme>
+  </a:themeElements>
   <a:extLst>
     <a:ext uri="{05A4C25C-085E-4340-85A3-A5531E510DB2}">
       <thm15:themeFamily xmlns:thm15="http://schemas.microsoft.com/office/thememl/2012/main" name="Office Theme" id="{62F939B6-93AF-4DB8-9C6B-D6C7DFDC589F}" vid="{4A3C46E8-61CC-4603-A589-7422A47A8E4A}"/>
